--- a/deliverables/05_Presentation_Deck.pptx
+++ b/deliverables/05_Presentation_Deck.pptx
@@ -18,6 +18,11 @@
     <p:sldId id="266" r:id="rId17"/>
     <p:sldId id="267" r:id="rId18"/>
     <p:sldId id="268" r:id="rId19"/>
+    <p:sldId id="270" r:id="rId21"/>
+    <p:sldId id="271" r:id="rId22"/>
+    <p:sldId id="272" r:id="rId23"/>
+    <p:sldId id="273" r:id="rId24"/>
+    <p:sldId id="274" r:id="rId25"/>
     <p:sldId id="269" r:id="rId20"/>
   </p:sldIdLst>
   <p:sldSz cx="12188952" cy="6858000" type="screen4x3"/>
@@ -7569,6 +7574,4557 @@
                 </a:solidFill>
               </a:rPr>
               <a:t>7 Agents  •  3 Skills  •  6 Hooks  •  KEYWORD_MAP  •  3 Log Files  •  49 Tests  •  100% Pass</a:t>
+            </a:r>
+          </a:p>
+        </p:txBody>
+      </p:sp>
+    </p:spTree>
+  </p:cSld>
+  <p:clrMapOvr>
+    <a:masterClrMapping/>
+  </p:clrMapOvr>
+</p:sld>
+</file>
+
+<file path=ppt/slides/slide15.xml><?xml version="1.0" encoding="utf-8"?>
+<p:sld xmlns:a="http://schemas.openxmlformats.org/drawingml/2006/main" xmlns:p="http://schemas.openxmlformats.org/presentationml/2006/main" xmlns:r="http://schemas.openxmlformats.org/officeDocument/2006/relationships">
+  <p:cSld>
+    <p:bg>
+      <p:bgPr>
+        <a:solidFill>
+          <a:srgbClr val="FFFFFF"/>
+        </a:solidFill>
+        <a:effectLst/>
+      </p:bgPr>
+    </p:bg>
+    <p:spTree>
+      <p:nvGrpSpPr>
+        <p:cNvPr id="1" name=""/>
+        <p:cNvGrpSpPr/>
+        <p:nvPr/>
+      </p:nvGrpSpPr>
+      <p:grpSpPr/>
+      <p:sp>
+        <p:nvSpPr>
+          <p:cNvPr id="2" name="Rectangle 1"/>
+          <p:cNvSpPr/>
+          <p:nvPr/>
+        </p:nvSpPr>
+        <p:spPr>
+          <a:xfrm>
+            <a:off x="0" y="0"/>
+            <a:ext cx="12188952" cy="1097280"/>
+          </a:xfrm>
+          <a:prstGeom prst="rect">
+            <a:avLst/>
+          </a:prstGeom>
+          <a:solidFill>
+            <a:srgbClr val="0066CC"/>
+          </a:solidFill>
+          <a:ln>
+            <a:noFill/>
+          </a:ln>
+        </p:spPr>
+        <p:style>
+          <a:lnRef idx="1">
+            <a:schemeClr val="accent1"/>
+          </a:lnRef>
+          <a:fillRef idx="3">
+            <a:schemeClr val="accent1"/>
+          </a:fillRef>
+          <a:effectRef idx="2">
+            <a:schemeClr val="accent1"/>
+          </a:effectRef>
+          <a:fontRef idx="minor">
+            <a:schemeClr val="lt1"/>
+          </a:fontRef>
+        </p:style>
+        <p:txBody>
+          <a:bodyPr rtlCol="0" anchor="ctr"/>
+          <a:lstStyle/>
+          <a:p>
+            <a:pPr algn="ctr"/>
+          </a:p>
+        </p:txBody>
+      </p:sp>
+      <p:sp>
+        <p:nvSpPr>
+          <p:cNvPr id="3" name="TextBox 2"/>
+          <p:cNvSpPr txBox="1"/>
+          <p:nvPr/>
+        </p:nvSpPr>
+        <p:spPr>
+          <a:xfrm>
+            <a:off x="365760" y="164592"/>
+            <a:ext cx="11430000" cy="822960"/>
+          </a:xfrm>
+          <a:prstGeom prst="rect">
+            <a:avLst/>
+          </a:prstGeom>
+          <a:noFill/>
+        </p:spPr>
+        <p:txBody>
+          <a:bodyPr wrap="square">
+            <a:spAutoFit/>
+          </a:bodyPr>
+          <a:lstStyle/>
+          <a:p>
+            <a:pPr algn="l"/>
+            <a:r>
+              <a:rPr sz="2600" b="1" i="0">
+                <a:solidFill>
+                  <a:srgbClr val="FFFFFF"/>
+                </a:solidFill>
+              </a:rPr>
+              <a:t>MCP &amp; Plugin Integration</a:t>
+            </a:r>
+          </a:p>
+        </p:txBody>
+      </p:sp>
+      <p:sp>
+        <p:nvSpPr>
+          <p:cNvPr id="4" name="TextBox 3"/>
+          <p:cNvSpPr txBox="1"/>
+          <p:nvPr/>
+        </p:nvSpPr>
+        <p:spPr>
+          <a:xfrm>
+            <a:off x="365760" y="1188720"/>
+            <a:ext cx="11430000" cy="502920"/>
+          </a:xfrm>
+          <a:prstGeom prst="rect">
+            <a:avLst/>
+          </a:prstGeom>
+          <a:noFill/>
+        </p:spPr>
+        <p:txBody>
+          <a:bodyPr wrap="square">
+            <a:spAutoFit/>
+          </a:bodyPr>
+          <a:lstStyle/>
+          <a:p>
+            <a:pPr algn="l"/>
+            <a:r>
+              <a:rPr sz="1200" b="0" i="1">
+                <a:solidFill>
+                  <a:srgbClr val="003366"/>
+                </a:solidFill>
+              </a:rPr>
+              <a:t>mcp_server.py exposes the full NexaBank knowledge base as 5 MCP tools — usable by Claude Desktop, Claude Code, or any MCP-compatible AI agent.</a:t>
+            </a:r>
+          </a:p>
+        </p:txBody>
+      </p:sp>
+      <p:sp>
+        <p:nvSpPr>
+          <p:cNvPr id="5" name="Rectangle 4"/>
+          <p:cNvSpPr/>
+          <p:nvPr/>
+        </p:nvSpPr>
+        <p:spPr>
+          <a:xfrm>
+            <a:off x="365760" y="1828800"/>
+            <a:ext cx="3200400" cy="731520"/>
+          </a:xfrm>
+          <a:prstGeom prst="rect">
+            <a:avLst/>
+          </a:prstGeom>
+          <a:solidFill>
+            <a:srgbClr val="003366"/>
+          </a:solidFill>
+          <a:ln>
+            <a:noFill/>
+          </a:ln>
+        </p:spPr>
+        <p:style>
+          <a:lnRef idx="1">
+            <a:schemeClr val="accent1"/>
+          </a:lnRef>
+          <a:fillRef idx="3">
+            <a:schemeClr val="accent1"/>
+          </a:fillRef>
+          <a:effectRef idx="2">
+            <a:schemeClr val="accent1"/>
+          </a:effectRef>
+          <a:fontRef idx="minor">
+            <a:schemeClr val="lt1"/>
+          </a:fontRef>
+        </p:style>
+        <p:txBody>
+          <a:bodyPr rtlCol="0" anchor="ctr"/>
+          <a:lstStyle/>
+          <a:p>
+            <a:pPr algn="ctr"/>
+          </a:p>
+        </p:txBody>
+      </p:sp>
+      <p:sp>
+        <p:nvSpPr>
+          <p:cNvPr id="6" name="TextBox 5"/>
+          <p:cNvSpPr txBox="1"/>
+          <p:nvPr/>
+        </p:nvSpPr>
+        <p:spPr>
+          <a:xfrm>
+            <a:off x="457200" y="1901952"/>
+            <a:ext cx="3017520" cy="594360"/>
+          </a:xfrm>
+          <a:prstGeom prst="rect">
+            <a:avLst/>
+          </a:prstGeom>
+          <a:noFill/>
+        </p:spPr>
+        <p:txBody>
+          <a:bodyPr wrap="square">
+            <a:spAutoFit/>
+          </a:bodyPr>
+          <a:lstStyle/>
+          <a:p>
+            <a:pPr algn="l"/>
+            <a:r>
+              <a:rPr sz="1100" b="1" i="0">
+                <a:solidFill>
+                  <a:srgbClr val="FFC107"/>
+                </a:solidFill>
+              </a:rPr>
+              <a:t>search_policy</a:t>
+            </a:r>
+          </a:p>
+        </p:txBody>
+      </p:sp>
+      <p:sp>
+        <p:nvSpPr>
+          <p:cNvPr id="7" name="Rectangle 6"/>
+          <p:cNvSpPr/>
+          <p:nvPr/>
+        </p:nvSpPr>
+        <p:spPr>
+          <a:xfrm>
+            <a:off x="3657600" y="1828800"/>
+            <a:ext cx="8229600" cy="731520"/>
+          </a:xfrm>
+          <a:prstGeom prst="rect">
+            <a:avLst/>
+          </a:prstGeom>
+          <a:solidFill>
+            <a:srgbClr val="CCE5FF"/>
+          </a:solidFill>
+          <a:ln>
+            <a:noFill/>
+          </a:ln>
+        </p:spPr>
+        <p:style>
+          <a:lnRef idx="1">
+            <a:schemeClr val="accent1"/>
+          </a:lnRef>
+          <a:fillRef idx="3">
+            <a:schemeClr val="accent1"/>
+          </a:fillRef>
+          <a:effectRef idx="2">
+            <a:schemeClr val="accent1"/>
+          </a:effectRef>
+          <a:fontRef idx="minor">
+            <a:schemeClr val="lt1"/>
+          </a:fontRef>
+        </p:style>
+        <p:txBody>
+          <a:bodyPr rtlCol="0" anchor="ctr"/>
+          <a:lstStyle/>
+          <a:p>
+            <a:pPr algn="ctr"/>
+          </a:p>
+        </p:txBody>
+      </p:sp>
+      <p:sp>
+        <p:nvSpPr>
+          <p:cNvPr id="8" name="TextBox 7"/>
+          <p:cNvSpPr txBox="1"/>
+          <p:nvPr/>
+        </p:nvSpPr>
+        <p:spPr>
+          <a:xfrm>
+            <a:off x="3749039" y="1938528"/>
+            <a:ext cx="8046720" cy="548640"/>
+          </a:xfrm>
+          <a:prstGeom prst="rect">
+            <a:avLst/>
+          </a:prstGeom>
+          <a:noFill/>
+        </p:spPr>
+        <p:txBody>
+          <a:bodyPr wrap="square">
+            <a:spAutoFit/>
+          </a:bodyPr>
+          <a:lstStyle/>
+          <a:p>
+            <a:pPr algn="l"/>
+            <a:r>
+              <a:rPr sz="1100" b="0" i="0">
+                <a:solidFill>
+                  <a:srgbClr val="003366"/>
+                </a:solidFill>
+              </a:rPr>
+              <a:t>Keyword search → best-matching policy snippet + source badge</a:t>
+            </a:r>
+          </a:p>
+        </p:txBody>
+      </p:sp>
+      <p:sp>
+        <p:nvSpPr>
+          <p:cNvPr id="9" name="Rectangle 8"/>
+          <p:cNvSpPr/>
+          <p:nvPr/>
+        </p:nvSpPr>
+        <p:spPr>
+          <a:xfrm>
+            <a:off x="365760" y="2697480"/>
+            <a:ext cx="3200400" cy="731520"/>
+          </a:xfrm>
+          <a:prstGeom prst="rect">
+            <a:avLst/>
+          </a:prstGeom>
+          <a:solidFill>
+            <a:srgbClr val="003366"/>
+          </a:solidFill>
+          <a:ln>
+            <a:noFill/>
+          </a:ln>
+        </p:spPr>
+        <p:style>
+          <a:lnRef idx="1">
+            <a:schemeClr val="accent1"/>
+          </a:lnRef>
+          <a:fillRef idx="3">
+            <a:schemeClr val="accent1"/>
+          </a:fillRef>
+          <a:effectRef idx="2">
+            <a:schemeClr val="accent1"/>
+          </a:effectRef>
+          <a:fontRef idx="minor">
+            <a:schemeClr val="lt1"/>
+          </a:fontRef>
+        </p:style>
+        <p:txBody>
+          <a:bodyPr rtlCol="0" anchor="ctr"/>
+          <a:lstStyle/>
+          <a:p>
+            <a:pPr algn="ctr"/>
+          </a:p>
+        </p:txBody>
+      </p:sp>
+      <p:sp>
+        <p:nvSpPr>
+          <p:cNvPr id="10" name="TextBox 9"/>
+          <p:cNvSpPr txBox="1"/>
+          <p:nvPr/>
+        </p:nvSpPr>
+        <p:spPr>
+          <a:xfrm>
+            <a:off x="457200" y="2770632"/>
+            <a:ext cx="3017520" cy="594360"/>
+          </a:xfrm>
+          <a:prstGeom prst="rect">
+            <a:avLst/>
+          </a:prstGeom>
+          <a:noFill/>
+        </p:spPr>
+        <p:txBody>
+          <a:bodyPr wrap="square">
+            <a:spAutoFit/>
+          </a:bodyPr>
+          <a:lstStyle/>
+          <a:p>
+            <a:pPr algn="l"/>
+            <a:r>
+              <a:rPr sz="1100" b="1" i="0">
+                <a:solidFill>
+                  <a:srgbClr val="FFC107"/>
+                </a:solidFill>
+              </a:rPr>
+              <a:t>list_policies</a:t>
+            </a:r>
+          </a:p>
+        </p:txBody>
+      </p:sp>
+      <p:sp>
+        <p:nvSpPr>
+          <p:cNvPr id="11" name="Rectangle 10"/>
+          <p:cNvSpPr/>
+          <p:nvPr/>
+        </p:nvSpPr>
+        <p:spPr>
+          <a:xfrm>
+            <a:off x="3657600" y="2697480"/>
+            <a:ext cx="8229600" cy="731520"/>
+          </a:xfrm>
+          <a:prstGeom prst="rect">
+            <a:avLst/>
+          </a:prstGeom>
+          <a:solidFill>
+            <a:srgbClr val="CCE5FF"/>
+          </a:solidFill>
+          <a:ln>
+            <a:noFill/>
+          </a:ln>
+        </p:spPr>
+        <p:style>
+          <a:lnRef idx="1">
+            <a:schemeClr val="accent1"/>
+          </a:lnRef>
+          <a:fillRef idx="3">
+            <a:schemeClr val="accent1"/>
+          </a:fillRef>
+          <a:effectRef idx="2">
+            <a:schemeClr val="accent1"/>
+          </a:effectRef>
+          <a:fontRef idx="minor">
+            <a:schemeClr val="lt1"/>
+          </a:fontRef>
+        </p:style>
+        <p:txBody>
+          <a:bodyPr rtlCol="0" anchor="ctr"/>
+          <a:lstStyle/>
+          <a:p>
+            <a:pPr algn="ctr"/>
+          </a:p>
+        </p:txBody>
+      </p:sp>
+      <p:sp>
+        <p:nvSpPr>
+          <p:cNvPr id="12" name="TextBox 11"/>
+          <p:cNvSpPr txBox="1"/>
+          <p:nvPr/>
+        </p:nvSpPr>
+        <p:spPr>
+          <a:xfrm>
+            <a:off x="3749039" y="2807208"/>
+            <a:ext cx="8046720" cy="548640"/>
+          </a:xfrm>
+          <a:prstGeom prst="rect">
+            <a:avLst/>
+          </a:prstGeom>
+          <a:noFill/>
+        </p:spPr>
+        <p:txBody>
+          <a:bodyPr wrap="square">
+            <a:spAutoFit/>
+          </a:bodyPr>
+          <a:lstStyle/>
+          <a:p>
+            <a:pPr algn="l"/>
+            <a:r>
+              <a:rPr sz="1100" b="0" i="0">
+                <a:solidFill>
+                  <a:srgbClr val="003366"/>
+                </a:solidFill>
+              </a:rPr>
+              <a:t>Returns all 5 policy names, codes and sample topics</a:t>
+            </a:r>
+          </a:p>
+        </p:txBody>
+      </p:sp>
+      <p:sp>
+        <p:nvSpPr>
+          <p:cNvPr id="13" name="Rectangle 12"/>
+          <p:cNvSpPr/>
+          <p:nvPr/>
+        </p:nvSpPr>
+        <p:spPr>
+          <a:xfrm>
+            <a:off x="365760" y="3566160"/>
+            <a:ext cx="3200400" cy="731520"/>
+          </a:xfrm>
+          <a:prstGeom prst="rect">
+            <a:avLst/>
+          </a:prstGeom>
+          <a:solidFill>
+            <a:srgbClr val="003366"/>
+          </a:solidFill>
+          <a:ln>
+            <a:noFill/>
+          </a:ln>
+        </p:spPr>
+        <p:style>
+          <a:lnRef idx="1">
+            <a:schemeClr val="accent1"/>
+          </a:lnRef>
+          <a:fillRef idx="3">
+            <a:schemeClr val="accent1"/>
+          </a:fillRef>
+          <a:effectRef idx="2">
+            <a:schemeClr val="accent1"/>
+          </a:effectRef>
+          <a:fontRef idx="minor">
+            <a:schemeClr val="lt1"/>
+          </a:fontRef>
+        </p:style>
+        <p:txBody>
+          <a:bodyPr rtlCol="0" anchor="ctr"/>
+          <a:lstStyle/>
+          <a:p>
+            <a:pPr algn="ctr"/>
+          </a:p>
+        </p:txBody>
+      </p:sp>
+      <p:sp>
+        <p:nvSpPr>
+          <p:cNvPr id="14" name="TextBox 13"/>
+          <p:cNvSpPr txBox="1"/>
+          <p:nvPr/>
+        </p:nvSpPr>
+        <p:spPr>
+          <a:xfrm>
+            <a:off x="457200" y="3639312"/>
+            <a:ext cx="3017520" cy="594360"/>
+          </a:xfrm>
+          <a:prstGeom prst="rect">
+            <a:avLst/>
+          </a:prstGeom>
+          <a:noFill/>
+        </p:spPr>
+        <p:txBody>
+          <a:bodyPr wrap="square">
+            <a:spAutoFit/>
+          </a:bodyPr>
+          <a:lstStyle/>
+          <a:p>
+            <a:pPr algn="l"/>
+            <a:r>
+              <a:rPr sz="1100" b="1" i="0">
+                <a:solidFill>
+                  <a:srgbClr val="FFC107"/>
+                </a:solidFill>
+              </a:rPr>
+              <a:t>get_policy_full</a:t>
+            </a:r>
+          </a:p>
+        </p:txBody>
+      </p:sp>
+      <p:sp>
+        <p:nvSpPr>
+          <p:cNvPr id="15" name="Rectangle 14"/>
+          <p:cNvSpPr/>
+          <p:nvPr/>
+        </p:nvSpPr>
+        <p:spPr>
+          <a:xfrm>
+            <a:off x="3657600" y="3566160"/>
+            <a:ext cx="8229600" cy="731520"/>
+          </a:xfrm>
+          <a:prstGeom prst="rect">
+            <a:avLst/>
+          </a:prstGeom>
+          <a:solidFill>
+            <a:srgbClr val="CCE5FF"/>
+          </a:solidFill>
+          <a:ln>
+            <a:noFill/>
+          </a:ln>
+        </p:spPr>
+        <p:style>
+          <a:lnRef idx="1">
+            <a:schemeClr val="accent1"/>
+          </a:lnRef>
+          <a:fillRef idx="3">
+            <a:schemeClr val="accent1"/>
+          </a:fillRef>
+          <a:effectRef idx="2">
+            <a:schemeClr val="accent1"/>
+          </a:effectRef>
+          <a:fontRef idx="minor">
+            <a:schemeClr val="lt1"/>
+          </a:fontRef>
+        </p:style>
+        <p:txBody>
+          <a:bodyPr rtlCol="0" anchor="ctr"/>
+          <a:lstStyle/>
+          <a:p>
+            <a:pPr algn="ctr"/>
+          </a:p>
+        </p:txBody>
+      </p:sp>
+      <p:sp>
+        <p:nvSpPr>
+          <p:cNvPr id="16" name="TextBox 15"/>
+          <p:cNvSpPr txBox="1"/>
+          <p:nvPr/>
+        </p:nvSpPr>
+        <p:spPr>
+          <a:xfrm>
+            <a:off x="3749039" y="3675887"/>
+            <a:ext cx="8046720" cy="548640"/>
+          </a:xfrm>
+          <a:prstGeom prst="rect">
+            <a:avLst/>
+          </a:prstGeom>
+          <a:noFill/>
+        </p:spPr>
+        <p:txBody>
+          <a:bodyPr wrap="square">
+            <a:spAutoFit/>
+          </a:bodyPr>
+          <a:lstStyle/>
+          <a:p>
+            <a:pPr algn="l"/>
+            <a:r>
+              <a:rPr sz="1100" b="0" i="0">
+                <a:solidFill>
+                  <a:srgbClr val="003366"/>
+                </a:solidFill>
+              </a:rPr>
+              <a:t>Returns complete policy text by code (LP-001 … AOP-005)</a:t>
+            </a:r>
+          </a:p>
+        </p:txBody>
+      </p:sp>
+      <p:sp>
+        <p:nvSpPr>
+          <p:cNvPr id="17" name="Rectangle 16"/>
+          <p:cNvSpPr/>
+          <p:nvPr/>
+        </p:nvSpPr>
+        <p:spPr>
+          <a:xfrm>
+            <a:off x="365760" y="4434840"/>
+            <a:ext cx="3200400" cy="731520"/>
+          </a:xfrm>
+          <a:prstGeom prst="rect">
+            <a:avLst/>
+          </a:prstGeom>
+          <a:solidFill>
+            <a:srgbClr val="003366"/>
+          </a:solidFill>
+          <a:ln>
+            <a:noFill/>
+          </a:ln>
+        </p:spPr>
+        <p:style>
+          <a:lnRef idx="1">
+            <a:schemeClr val="accent1"/>
+          </a:lnRef>
+          <a:fillRef idx="3">
+            <a:schemeClr val="accent1"/>
+          </a:fillRef>
+          <a:effectRef idx="2">
+            <a:schemeClr val="accent1"/>
+          </a:effectRef>
+          <a:fontRef idx="minor">
+            <a:schemeClr val="lt1"/>
+          </a:fontRef>
+        </p:style>
+        <p:txBody>
+          <a:bodyPr rtlCol="0" anchor="ctr"/>
+          <a:lstStyle/>
+          <a:p>
+            <a:pPr algn="ctr"/>
+          </a:p>
+        </p:txBody>
+      </p:sp>
+      <p:sp>
+        <p:nvSpPr>
+          <p:cNvPr id="18" name="TextBox 17"/>
+          <p:cNvSpPr txBox="1"/>
+          <p:nvPr/>
+        </p:nvSpPr>
+        <p:spPr>
+          <a:xfrm>
+            <a:off x="457200" y="4507992"/>
+            <a:ext cx="3017520" cy="594360"/>
+          </a:xfrm>
+          <a:prstGeom prst="rect">
+            <a:avLst/>
+          </a:prstGeom>
+          <a:noFill/>
+        </p:spPr>
+        <p:txBody>
+          <a:bodyPr wrap="square">
+            <a:spAutoFit/>
+          </a:bodyPr>
+          <a:lstStyle/>
+          <a:p>
+            <a:pPr algn="l"/>
+            <a:r>
+              <a:rPr sz="1100" b="1" i="0">
+                <a:solidFill>
+                  <a:srgbClr val="FFC107"/>
+                </a:solidFill>
+              </a:rPr>
+              <a:t>cross_reference</a:t>
+            </a:r>
+          </a:p>
+        </p:txBody>
+      </p:sp>
+      <p:sp>
+        <p:nvSpPr>
+          <p:cNvPr id="19" name="Rectangle 18"/>
+          <p:cNvSpPr/>
+          <p:nvPr/>
+        </p:nvSpPr>
+        <p:spPr>
+          <a:xfrm>
+            <a:off x="3657600" y="4434840"/>
+            <a:ext cx="8229600" cy="731520"/>
+          </a:xfrm>
+          <a:prstGeom prst="rect">
+            <a:avLst/>
+          </a:prstGeom>
+          <a:solidFill>
+            <a:srgbClr val="CCE5FF"/>
+          </a:solidFill>
+          <a:ln>
+            <a:noFill/>
+          </a:ln>
+        </p:spPr>
+        <p:style>
+          <a:lnRef idx="1">
+            <a:schemeClr val="accent1"/>
+          </a:lnRef>
+          <a:fillRef idx="3">
+            <a:schemeClr val="accent1"/>
+          </a:fillRef>
+          <a:effectRef idx="2">
+            <a:schemeClr val="accent1"/>
+          </a:effectRef>
+          <a:fontRef idx="minor">
+            <a:schemeClr val="lt1"/>
+          </a:fontRef>
+        </p:style>
+        <p:txBody>
+          <a:bodyPr rtlCol="0" anchor="ctr"/>
+          <a:lstStyle/>
+          <a:p>
+            <a:pPr algn="ctr"/>
+          </a:p>
+        </p:txBody>
+      </p:sp>
+      <p:sp>
+        <p:nvSpPr>
+          <p:cNvPr id="20" name="TextBox 19"/>
+          <p:cNvSpPr txBox="1"/>
+          <p:nvPr/>
+        </p:nvSpPr>
+        <p:spPr>
+          <a:xfrm>
+            <a:off x="3749039" y="4544568"/>
+            <a:ext cx="8046720" cy="548640"/>
+          </a:xfrm>
+          <a:prstGeom prst="rect">
+            <a:avLst/>
+          </a:prstGeom>
+          <a:noFill/>
+        </p:spPr>
+        <p:txBody>
+          <a:bodyPr wrap="square">
+            <a:spAutoFit/>
+          </a:bodyPr>
+          <a:lstStyle/>
+          <a:p>
+            <a:pPr algn="l"/>
+            <a:r>
+              <a:rPr sz="1100" b="0" i="0">
+                <a:solidFill>
+                  <a:srgbClr val="003366"/>
+                </a:solidFill>
+              </a:rPr>
+              <a:t>Finds ALL policies matching a multi-domain question</a:t>
+            </a:r>
+          </a:p>
+        </p:txBody>
+      </p:sp>
+      <p:sp>
+        <p:nvSpPr>
+          <p:cNvPr id="21" name="Rectangle 20"/>
+          <p:cNvSpPr/>
+          <p:nvPr/>
+        </p:nvSpPr>
+        <p:spPr>
+          <a:xfrm>
+            <a:off x="365760" y="5303520"/>
+            <a:ext cx="3200400" cy="731520"/>
+          </a:xfrm>
+          <a:prstGeom prst="rect">
+            <a:avLst/>
+          </a:prstGeom>
+          <a:solidFill>
+            <a:srgbClr val="003366"/>
+          </a:solidFill>
+          <a:ln>
+            <a:noFill/>
+          </a:ln>
+        </p:spPr>
+        <p:style>
+          <a:lnRef idx="1">
+            <a:schemeClr val="accent1"/>
+          </a:lnRef>
+          <a:fillRef idx="3">
+            <a:schemeClr val="accent1"/>
+          </a:fillRef>
+          <a:effectRef idx="2">
+            <a:schemeClr val="accent1"/>
+          </a:effectRef>
+          <a:fontRef idx="minor">
+            <a:schemeClr val="lt1"/>
+          </a:fontRef>
+        </p:style>
+        <p:txBody>
+          <a:bodyPr rtlCol="0" anchor="ctr"/>
+          <a:lstStyle/>
+          <a:p>
+            <a:pPr algn="ctr"/>
+          </a:p>
+        </p:txBody>
+      </p:sp>
+      <p:sp>
+        <p:nvSpPr>
+          <p:cNvPr id="22" name="TextBox 21"/>
+          <p:cNvSpPr txBox="1"/>
+          <p:nvPr/>
+        </p:nvSpPr>
+        <p:spPr>
+          <a:xfrm>
+            <a:off x="457200" y="5376672"/>
+            <a:ext cx="3017520" cy="594360"/>
+          </a:xfrm>
+          <a:prstGeom prst="rect">
+            <a:avLst/>
+          </a:prstGeom>
+          <a:noFill/>
+        </p:spPr>
+        <p:txBody>
+          <a:bodyPr wrap="square">
+            <a:spAutoFit/>
+          </a:bodyPr>
+          <a:lstStyle/>
+          <a:p>
+            <a:pPr algn="l"/>
+            <a:r>
+              <a:rPr sz="1100" b="1" i="0">
+                <a:solidFill>
+                  <a:srgbClr val="FFC107"/>
+                </a:solidFill>
+              </a:rPr>
+              <a:t>check_compliance_risk</a:t>
+            </a:r>
+          </a:p>
+        </p:txBody>
+      </p:sp>
+      <p:sp>
+        <p:nvSpPr>
+          <p:cNvPr id="23" name="Rectangle 22"/>
+          <p:cNvSpPr/>
+          <p:nvPr/>
+        </p:nvSpPr>
+        <p:spPr>
+          <a:xfrm>
+            <a:off x="3657600" y="5303520"/>
+            <a:ext cx="8229600" cy="731520"/>
+          </a:xfrm>
+          <a:prstGeom prst="rect">
+            <a:avLst/>
+          </a:prstGeom>
+          <a:solidFill>
+            <a:srgbClr val="CCE5FF"/>
+          </a:solidFill>
+          <a:ln>
+            <a:noFill/>
+          </a:ln>
+        </p:spPr>
+        <p:style>
+          <a:lnRef idx="1">
+            <a:schemeClr val="accent1"/>
+          </a:lnRef>
+          <a:fillRef idx="3">
+            <a:schemeClr val="accent1"/>
+          </a:fillRef>
+          <a:effectRef idx="2">
+            <a:schemeClr val="accent1"/>
+          </a:effectRef>
+          <a:fontRef idx="minor">
+            <a:schemeClr val="lt1"/>
+          </a:fontRef>
+        </p:style>
+        <p:txBody>
+          <a:bodyPr rtlCol="0" anchor="ctr"/>
+          <a:lstStyle/>
+          <a:p>
+            <a:pPr algn="ctr"/>
+          </a:p>
+        </p:txBody>
+      </p:sp>
+      <p:sp>
+        <p:nvSpPr>
+          <p:cNvPr id="24" name="TextBox 23"/>
+          <p:cNvSpPr txBox="1"/>
+          <p:nvPr/>
+        </p:nvSpPr>
+        <p:spPr>
+          <a:xfrm>
+            <a:off x="3749039" y="5413248"/>
+            <a:ext cx="8046720" cy="548640"/>
+          </a:xfrm>
+          <a:prstGeom prst="rect">
+            <a:avLst/>
+          </a:prstGeom>
+          <a:noFill/>
+        </p:spPr>
+        <p:txBody>
+          <a:bodyPr wrap="square">
+            <a:spAutoFit/>
+          </a:bodyPr>
+          <a:lstStyle/>
+          <a:p>
+            <a:pPr algn="l"/>
+            <a:r>
+              <a:rPr sz="1100" b="0" i="0">
+                <a:solidFill>
+                  <a:srgbClr val="003366"/>
+                </a:solidFill>
+              </a:rPr>
+              <a:t>Screens question against 14 compliance risk keywords</a:t>
+            </a:r>
+          </a:p>
+        </p:txBody>
+      </p:sp>
+      <p:sp>
+        <p:nvSpPr>
+          <p:cNvPr id="25" name="TextBox 24"/>
+          <p:cNvSpPr txBox="1"/>
+          <p:nvPr/>
+        </p:nvSpPr>
+        <p:spPr>
+          <a:xfrm>
+            <a:off x="365760" y="6217920"/>
+            <a:ext cx="11430000" cy="457200"/>
+          </a:xfrm>
+          <a:prstGeom prst="rect">
+            <a:avLst/>
+          </a:prstGeom>
+          <a:noFill/>
+        </p:spPr>
+        <p:txBody>
+          <a:bodyPr wrap="square">
+            <a:spAutoFit/>
+          </a:bodyPr>
+          <a:lstStyle/>
+          <a:p>
+            <a:pPr algn="l"/>
+            <a:r>
+              <a:rPr sz="1000" b="0" i="1">
+                <a:solidFill>
+                  <a:srgbClr val="0066CC"/>
+                </a:solidFill>
+              </a:rPr>
+              <a:t>Protocol: MCP JSON-RPC 2.0 over stdio  |  Config: claude_mcp_config.json  |  Both Streamlit UI &amp; MCP share the same knowledge base + KEYWORD_MAP</a:t>
+            </a:r>
+          </a:p>
+        </p:txBody>
+      </p:sp>
+    </p:spTree>
+  </p:cSld>
+  <p:clrMapOvr>
+    <a:masterClrMapping/>
+  </p:clrMapOvr>
+</p:sld>
+</file>
+
+<file path=ppt/slides/slide16.xml><?xml version="1.0" encoding="utf-8"?>
+<p:sld xmlns:a="http://schemas.openxmlformats.org/drawingml/2006/main" xmlns:p="http://schemas.openxmlformats.org/presentationml/2006/main" xmlns:r="http://schemas.openxmlformats.org/officeDocument/2006/relationships">
+  <p:cSld>
+    <p:bg>
+      <p:bgPr>
+        <a:solidFill>
+          <a:srgbClr val="FFFFFF"/>
+        </a:solidFill>
+        <a:effectLst/>
+      </p:bgPr>
+    </p:bg>
+    <p:spTree>
+      <p:nvGrpSpPr>
+        <p:cNvPr id="1" name=""/>
+        <p:cNvGrpSpPr/>
+        <p:nvPr/>
+      </p:nvGrpSpPr>
+      <p:grpSpPr/>
+      <p:sp>
+        <p:nvSpPr>
+          <p:cNvPr id="2" name="Rectangle 1"/>
+          <p:cNvSpPr/>
+          <p:nvPr/>
+        </p:nvSpPr>
+        <p:spPr>
+          <a:xfrm>
+            <a:off x="0" y="0"/>
+            <a:ext cx="12188952" cy="1097280"/>
+          </a:xfrm>
+          <a:prstGeom prst="rect">
+            <a:avLst/>
+          </a:prstGeom>
+          <a:solidFill>
+            <a:srgbClr val="007878"/>
+          </a:solidFill>
+          <a:ln>
+            <a:noFill/>
+          </a:ln>
+        </p:spPr>
+        <p:style>
+          <a:lnRef idx="1">
+            <a:schemeClr val="accent1"/>
+          </a:lnRef>
+          <a:fillRef idx="3">
+            <a:schemeClr val="accent1"/>
+          </a:fillRef>
+          <a:effectRef idx="2">
+            <a:schemeClr val="accent1"/>
+          </a:effectRef>
+          <a:fontRef idx="minor">
+            <a:schemeClr val="lt1"/>
+          </a:fontRef>
+        </p:style>
+        <p:txBody>
+          <a:bodyPr rtlCol="0" anchor="ctr"/>
+          <a:lstStyle/>
+          <a:p>
+            <a:pPr algn="ctr"/>
+          </a:p>
+        </p:txBody>
+      </p:sp>
+      <p:sp>
+        <p:nvSpPr>
+          <p:cNvPr id="3" name="TextBox 2"/>
+          <p:cNvSpPr txBox="1"/>
+          <p:nvPr/>
+        </p:nvSpPr>
+        <p:spPr>
+          <a:xfrm>
+            <a:off x="365760" y="164592"/>
+            <a:ext cx="11430000" cy="822960"/>
+          </a:xfrm>
+          <a:prstGeom prst="rect">
+            <a:avLst/>
+          </a:prstGeom>
+          <a:noFill/>
+        </p:spPr>
+        <p:txBody>
+          <a:bodyPr wrap="square">
+            <a:spAutoFit/>
+          </a:bodyPr>
+          <a:lstStyle/>
+          <a:p>
+            <a:pPr algn="l"/>
+            <a:r>
+              <a:rPr sz="2600" b="1" i="0">
+                <a:solidFill>
+                  <a:srgbClr val="FFFFFF"/>
+                </a:solidFill>
+              </a:rPr>
+              <a:t>Observability &amp; Traceability</a:t>
+            </a:r>
+          </a:p>
+        </p:txBody>
+      </p:sp>
+      <p:sp>
+        <p:nvSpPr>
+          <p:cNvPr id="4" name="TextBox 3"/>
+          <p:cNvSpPr txBox="1"/>
+          <p:nvPr/>
+        </p:nvSpPr>
+        <p:spPr>
+          <a:xfrm>
+            <a:off x="365760" y="1188720"/>
+            <a:ext cx="11430000" cy="457200"/>
+          </a:xfrm>
+          <a:prstGeom prst="rect">
+            <a:avLst/>
+          </a:prstGeom>
+          <a:noFill/>
+        </p:spPr>
+        <p:txBody>
+          <a:bodyPr wrap="square">
+            <a:spAutoFit/>
+          </a:bodyPr>
+          <a:lstStyle/>
+          <a:p>
+            <a:pPr algn="l"/>
+            <a:r>
+              <a:rPr sz="1200" b="0" i="1">
+                <a:solidFill>
+                  <a:srgbClr val="003366"/>
+                </a:solidFill>
+              </a:rPr>
+              <a:t>Every query is fully traceable — from input validation to final answer — across 3 structured log files and 6 lifecycle hooks.</a:t>
+            </a:r>
+          </a:p>
+        </p:txBody>
+      </p:sp>
+      <p:sp>
+        <p:nvSpPr>
+          <p:cNvPr id="5" name="Rectangle 4"/>
+          <p:cNvSpPr/>
+          <p:nvPr/>
+        </p:nvSpPr>
+        <p:spPr>
+          <a:xfrm>
+            <a:off x="274320" y="1828800"/>
+            <a:ext cx="2560320" cy="1097280"/>
+          </a:xfrm>
+          <a:prstGeom prst="rect">
+            <a:avLst/>
+          </a:prstGeom>
+          <a:solidFill>
+            <a:srgbClr val="003366"/>
+          </a:solidFill>
+          <a:ln>
+            <a:noFill/>
+          </a:ln>
+        </p:spPr>
+        <p:style>
+          <a:lnRef idx="1">
+            <a:schemeClr val="accent1"/>
+          </a:lnRef>
+          <a:fillRef idx="3">
+            <a:schemeClr val="accent1"/>
+          </a:fillRef>
+          <a:effectRef idx="2">
+            <a:schemeClr val="accent1"/>
+          </a:effectRef>
+          <a:fontRef idx="minor">
+            <a:schemeClr val="lt1"/>
+          </a:fontRef>
+        </p:style>
+        <p:txBody>
+          <a:bodyPr rtlCol="0" anchor="ctr"/>
+          <a:lstStyle/>
+          <a:p>
+            <a:pPr algn="ctr"/>
+          </a:p>
+        </p:txBody>
+      </p:sp>
+      <p:sp>
+        <p:nvSpPr>
+          <p:cNvPr id="6" name="TextBox 5"/>
+          <p:cNvSpPr txBox="1"/>
+          <p:nvPr/>
+        </p:nvSpPr>
+        <p:spPr>
+          <a:xfrm>
+            <a:off x="365760" y="1920240"/>
+            <a:ext cx="2377440" cy="457200"/>
+          </a:xfrm>
+          <a:prstGeom prst="rect">
+            <a:avLst/>
+          </a:prstGeom>
+          <a:noFill/>
+        </p:spPr>
+        <p:txBody>
+          <a:bodyPr wrap="square">
+            <a:spAutoFit/>
+          </a:bodyPr>
+          <a:lstStyle/>
+          <a:p>
+            <a:pPr algn="l"/>
+            <a:r>
+              <a:rPr sz="1200" b="1" i="0">
+                <a:solidFill>
+                  <a:srgbClr val="FFFFFF"/>
+                </a:solidFill>
+              </a:rPr>
+              <a:t>📋 query_audit.log</a:t>
+            </a:r>
+          </a:p>
+        </p:txBody>
+      </p:sp>
+      <p:sp>
+        <p:nvSpPr>
+          <p:cNvPr id="7" name="TextBox 6"/>
+          <p:cNvSpPr txBox="1"/>
+          <p:nvPr/>
+        </p:nvSpPr>
+        <p:spPr>
+          <a:xfrm>
+            <a:off x="365760" y="2423160"/>
+            <a:ext cx="2377440" cy="365760"/>
+          </a:xfrm>
+          <a:prstGeom prst="rect">
+            <a:avLst/>
+          </a:prstGeom>
+          <a:noFill/>
+        </p:spPr>
+        <p:txBody>
+          <a:bodyPr wrap="square">
+            <a:spAutoFit/>
+          </a:bodyPr>
+          <a:lstStyle/>
+          <a:p>
+            <a:pPr algn="l"/>
+            <a:r>
+              <a:rPr sz="1000" b="0" i="0">
+                <a:solidFill>
+                  <a:srgbClr val="FFC107"/>
+                </a:solidFill>
+              </a:rPr>
+              <a:t>Every query</a:t>
+            </a:r>
+          </a:p>
+        </p:txBody>
+      </p:sp>
+      <p:sp>
+        <p:nvSpPr>
+          <p:cNvPr id="8" name="Rectangle 7"/>
+          <p:cNvSpPr/>
+          <p:nvPr/>
+        </p:nvSpPr>
+        <p:spPr>
+          <a:xfrm>
+            <a:off x="3017520" y="1828800"/>
+            <a:ext cx="8869680" cy="1097280"/>
+          </a:xfrm>
+          <a:prstGeom prst="rect">
+            <a:avLst/>
+          </a:prstGeom>
+          <a:solidFill>
+            <a:srgbClr val="CCE5FF"/>
+          </a:solidFill>
+          <a:ln>
+            <a:noFill/>
+          </a:ln>
+        </p:spPr>
+        <p:style>
+          <a:lnRef idx="1">
+            <a:schemeClr val="accent1"/>
+          </a:lnRef>
+          <a:fillRef idx="3">
+            <a:schemeClr val="accent1"/>
+          </a:fillRef>
+          <a:effectRef idx="2">
+            <a:schemeClr val="accent1"/>
+          </a:effectRef>
+          <a:fontRef idx="minor">
+            <a:schemeClr val="lt1"/>
+          </a:fontRef>
+        </p:style>
+        <p:txBody>
+          <a:bodyPr rtlCol="0" anchor="ctr"/>
+          <a:lstStyle/>
+          <a:p>
+            <a:pPr algn="ctr"/>
+          </a:p>
+        </p:txBody>
+      </p:sp>
+      <p:sp>
+        <p:nvSpPr>
+          <p:cNvPr id="9" name="TextBox 8"/>
+          <p:cNvSpPr txBox="1"/>
+          <p:nvPr/>
+        </p:nvSpPr>
+        <p:spPr>
+          <a:xfrm>
+            <a:off x="3154680" y="2057400"/>
+            <a:ext cx="8686800" cy="640080"/>
+          </a:xfrm>
+          <a:prstGeom prst="rect">
+            <a:avLst/>
+          </a:prstGeom>
+          <a:noFill/>
+        </p:spPr>
+        <p:txBody>
+          <a:bodyPr wrap="square">
+            <a:spAutoFit/>
+          </a:bodyPr>
+          <a:lstStyle/>
+          <a:p>
+            <a:pPr algn="l"/>
+            <a:r>
+              <a:rPr sz="1100" b="0" i="0">
+                <a:solidFill>
+                  <a:srgbClr val="003366"/>
+                </a:solidFill>
+              </a:rPr>
+              <a:t>Timestamp · Session ID · STATUS (MATCHED/FALLBACK) · Policy matched · Question text</a:t>
+            </a:r>
+          </a:p>
+        </p:txBody>
+      </p:sp>
+      <p:sp>
+        <p:nvSpPr>
+          <p:cNvPr id="10" name="Rectangle 9"/>
+          <p:cNvSpPr/>
+          <p:nvPr/>
+        </p:nvSpPr>
+        <p:spPr>
+          <a:xfrm>
+            <a:off x="274320" y="3200400"/>
+            <a:ext cx="2560320" cy="1097280"/>
+          </a:xfrm>
+          <a:prstGeom prst="rect">
+            <a:avLst/>
+          </a:prstGeom>
+          <a:solidFill>
+            <a:srgbClr val="003366"/>
+          </a:solidFill>
+          <a:ln>
+            <a:noFill/>
+          </a:ln>
+        </p:spPr>
+        <p:style>
+          <a:lnRef idx="1">
+            <a:schemeClr val="accent1"/>
+          </a:lnRef>
+          <a:fillRef idx="3">
+            <a:schemeClr val="accent1"/>
+          </a:fillRef>
+          <a:effectRef idx="2">
+            <a:schemeClr val="accent1"/>
+          </a:effectRef>
+          <a:fontRef idx="minor">
+            <a:schemeClr val="lt1"/>
+          </a:fontRef>
+        </p:style>
+        <p:txBody>
+          <a:bodyPr rtlCol="0" anchor="ctr"/>
+          <a:lstStyle/>
+          <a:p>
+            <a:pPr algn="ctr"/>
+          </a:p>
+        </p:txBody>
+      </p:sp>
+      <p:sp>
+        <p:nvSpPr>
+          <p:cNvPr id="11" name="TextBox 10"/>
+          <p:cNvSpPr txBox="1"/>
+          <p:nvPr/>
+        </p:nvSpPr>
+        <p:spPr>
+          <a:xfrm>
+            <a:off x="365760" y="3291840"/>
+            <a:ext cx="2377440" cy="457200"/>
+          </a:xfrm>
+          <a:prstGeom prst="rect">
+            <a:avLst/>
+          </a:prstGeom>
+          <a:noFill/>
+        </p:spPr>
+        <p:txBody>
+          <a:bodyPr wrap="square">
+            <a:spAutoFit/>
+          </a:bodyPr>
+          <a:lstStyle/>
+          <a:p>
+            <a:pPr algn="l"/>
+            <a:r>
+              <a:rPr sz="1200" b="1" i="0">
+                <a:solidFill>
+                  <a:srgbClr val="FFFFFF"/>
+                </a:solidFill>
+              </a:rPr>
+              <a:t>⚠️ unresolved_queries.log</a:t>
+            </a:r>
+          </a:p>
+        </p:txBody>
+      </p:sp>
+      <p:sp>
+        <p:nvSpPr>
+          <p:cNvPr id="12" name="TextBox 11"/>
+          <p:cNvSpPr txBox="1"/>
+          <p:nvPr/>
+        </p:nvSpPr>
+        <p:spPr>
+          <a:xfrm>
+            <a:off x="365760" y="3794760"/>
+            <a:ext cx="2377440" cy="365760"/>
+          </a:xfrm>
+          <a:prstGeom prst="rect">
+            <a:avLst/>
+          </a:prstGeom>
+          <a:noFill/>
+        </p:spPr>
+        <p:txBody>
+          <a:bodyPr wrap="square">
+            <a:spAutoFit/>
+          </a:bodyPr>
+          <a:lstStyle/>
+          <a:p>
+            <a:pPr algn="l"/>
+            <a:r>
+              <a:rPr sz="1000" b="0" i="0">
+                <a:solidFill>
+                  <a:srgbClr val="FFC107"/>
+                </a:solidFill>
+              </a:rPr>
+              <a:t>Fallback queries</a:t>
+            </a:r>
+          </a:p>
+        </p:txBody>
+      </p:sp>
+      <p:sp>
+        <p:nvSpPr>
+          <p:cNvPr id="13" name="Rectangle 12"/>
+          <p:cNvSpPr/>
+          <p:nvPr/>
+        </p:nvSpPr>
+        <p:spPr>
+          <a:xfrm>
+            <a:off x="3017520" y="3200400"/>
+            <a:ext cx="8869680" cy="1097280"/>
+          </a:xfrm>
+          <a:prstGeom prst="rect">
+            <a:avLst/>
+          </a:prstGeom>
+          <a:solidFill>
+            <a:srgbClr val="CCE5FF"/>
+          </a:solidFill>
+          <a:ln>
+            <a:noFill/>
+          </a:ln>
+        </p:spPr>
+        <p:style>
+          <a:lnRef idx="1">
+            <a:schemeClr val="accent1"/>
+          </a:lnRef>
+          <a:fillRef idx="3">
+            <a:schemeClr val="accent1"/>
+          </a:fillRef>
+          <a:effectRef idx="2">
+            <a:schemeClr val="accent1"/>
+          </a:effectRef>
+          <a:fontRef idx="minor">
+            <a:schemeClr val="lt1"/>
+          </a:fontRef>
+        </p:style>
+        <p:txBody>
+          <a:bodyPr rtlCol="0" anchor="ctr"/>
+          <a:lstStyle/>
+          <a:p>
+            <a:pPr algn="ctr"/>
+          </a:p>
+        </p:txBody>
+      </p:sp>
+      <p:sp>
+        <p:nvSpPr>
+          <p:cNvPr id="14" name="TextBox 13"/>
+          <p:cNvSpPr txBox="1"/>
+          <p:nvPr/>
+        </p:nvSpPr>
+        <p:spPr>
+          <a:xfrm>
+            <a:off x="3154680" y="3429000"/>
+            <a:ext cx="8686800" cy="640080"/>
+          </a:xfrm>
+          <a:prstGeom prst="rect">
+            <a:avLst/>
+          </a:prstGeom>
+          <a:noFill/>
+        </p:spPr>
+        <p:txBody>
+          <a:bodyPr wrap="square">
+            <a:spAutoFit/>
+          </a:bodyPr>
+          <a:lstStyle/>
+          <a:p>
+            <a:pPr algn="l"/>
+            <a:r>
+              <a:rPr sz="1100" b="0" i="0">
+                <a:solidFill>
+                  <a:srgbClr val="003366"/>
+                </a:solidFill>
+              </a:rPr>
+              <a:t>Timestamp · Session ID · UNRESOLVED · Full question — for compliance gap analysis</a:t>
+            </a:r>
+          </a:p>
+        </p:txBody>
+      </p:sp>
+      <p:sp>
+        <p:nvSpPr>
+          <p:cNvPr id="15" name="Rectangle 14"/>
+          <p:cNvSpPr/>
+          <p:nvPr/>
+        </p:nvSpPr>
+        <p:spPr>
+          <a:xfrm>
+            <a:off x="274320" y="4572000"/>
+            <a:ext cx="2560320" cy="1097280"/>
+          </a:xfrm>
+          <a:prstGeom prst="rect">
+            <a:avLst/>
+          </a:prstGeom>
+          <a:solidFill>
+            <a:srgbClr val="003366"/>
+          </a:solidFill>
+          <a:ln>
+            <a:noFill/>
+          </a:ln>
+        </p:spPr>
+        <p:style>
+          <a:lnRef idx="1">
+            <a:schemeClr val="accent1"/>
+          </a:lnRef>
+          <a:fillRef idx="3">
+            <a:schemeClr val="accent1"/>
+          </a:fillRef>
+          <a:effectRef idx="2">
+            <a:schemeClr val="accent1"/>
+          </a:effectRef>
+          <a:fontRef idx="minor">
+            <a:schemeClr val="lt1"/>
+          </a:fontRef>
+        </p:style>
+        <p:txBody>
+          <a:bodyPr rtlCol="0" anchor="ctr"/>
+          <a:lstStyle/>
+          <a:p>
+            <a:pPr algn="ctr"/>
+          </a:p>
+        </p:txBody>
+      </p:sp>
+      <p:sp>
+        <p:nvSpPr>
+          <p:cNvPr id="16" name="TextBox 15"/>
+          <p:cNvSpPr txBox="1"/>
+          <p:nvPr/>
+        </p:nvSpPr>
+        <p:spPr>
+          <a:xfrm>
+            <a:off x="365760" y="4663440"/>
+            <a:ext cx="2377440" cy="457200"/>
+          </a:xfrm>
+          <a:prstGeom prst="rect">
+            <a:avLst/>
+          </a:prstGeom>
+          <a:noFill/>
+        </p:spPr>
+        <p:txBody>
+          <a:bodyPr wrap="square">
+            <a:spAutoFit/>
+          </a:bodyPr>
+          <a:lstStyle/>
+          <a:p>
+            <a:pPr algn="l"/>
+            <a:r>
+              <a:rPr sz="1200" b="1" i="0">
+                <a:solidFill>
+                  <a:srgbClr val="FFFFFF"/>
+                </a:solidFill>
+              </a:rPr>
+              <a:t>🔄 session_events.log</a:t>
+            </a:r>
+          </a:p>
+        </p:txBody>
+      </p:sp>
+      <p:sp>
+        <p:nvSpPr>
+          <p:cNvPr id="17" name="TextBox 16"/>
+          <p:cNvSpPr txBox="1"/>
+          <p:nvPr/>
+        </p:nvSpPr>
+        <p:spPr>
+          <a:xfrm>
+            <a:off x="365760" y="5166360"/>
+            <a:ext cx="2377440" cy="365760"/>
+          </a:xfrm>
+          <a:prstGeom prst="rect">
+            <a:avLst/>
+          </a:prstGeom>
+          <a:noFill/>
+        </p:spPr>
+        <p:txBody>
+          <a:bodyPr wrap="square">
+            <a:spAutoFit/>
+          </a:bodyPr>
+          <a:lstStyle/>
+          <a:p>
+            <a:pPr algn="l"/>
+            <a:r>
+              <a:rPr sz="1000" b="0" i="0">
+                <a:solidFill>
+                  <a:srgbClr val="FFC107"/>
+                </a:solidFill>
+              </a:rPr>
+              <a:t>All events</a:t>
+            </a:r>
+          </a:p>
+        </p:txBody>
+      </p:sp>
+      <p:sp>
+        <p:nvSpPr>
+          <p:cNvPr id="18" name="Rectangle 17"/>
+          <p:cNvSpPr/>
+          <p:nvPr/>
+        </p:nvSpPr>
+        <p:spPr>
+          <a:xfrm>
+            <a:off x="3017520" y="4572000"/>
+            <a:ext cx="8869680" cy="1097280"/>
+          </a:xfrm>
+          <a:prstGeom prst="rect">
+            <a:avLst/>
+          </a:prstGeom>
+          <a:solidFill>
+            <a:srgbClr val="CCE5FF"/>
+          </a:solidFill>
+          <a:ln>
+            <a:noFill/>
+          </a:ln>
+        </p:spPr>
+        <p:style>
+          <a:lnRef idx="1">
+            <a:schemeClr val="accent1"/>
+          </a:lnRef>
+          <a:fillRef idx="3">
+            <a:schemeClr val="accent1"/>
+          </a:fillRef>
+          <a:effectRef idx="2">
+            <a:schemeClr val="accent1"/>
+          </a:effectRef>
+          <a:fontRef idx="minor">
+            <a:schemeClr val="lt1"/>
+          </a:fontRef>
+        </p:style>
+        <p:txBody>
+          <a:bodyPr rtlCol="0" anchor="ctr"/>
+          <a:lstStyle/>
+          <a:p>
+            <a:pPr algn="ctr"/>
+          </a:p>
+        </p:txBody>
+      </p:sp>
+      <p:sp>
+        <p:nvSpPr>
+          <p:cNvPr id="19" name="TextBox 18"/>
+          <p:cNvSpPr txBox="1"/>
+          <p:nvPr/>
+        </p:nvSpPr>
+        <p:spPr>
+          <a:xfrm>
+            <a:off x="3154680" y="4800600"/>
+            <a:ext cx="8686800" cy="640080"/>
+          </a:xfrm>
+          <a:prstGeom prst="rect">
+            <a:avLst/>
+          </a:prstGeom>
+          <a:noFill/>
+        </p:spPr>
+        <p:txBody>
+          <a:bodyPr wrap="square">
+            <a:spAutoFit/>
+          </a:bodyPr>
+          <a:lstStyle/>
+          <a:p>
+            <a:pPr algn="l"/>
+            <a:r>
+              <a:rPr sz="1100" b="0" i="0">
+                <a:solidFill>
+                  <a:srgbClr val="003366"/>
+                </a:solidFill>
+              </a:rPr>
+              <a:t>PRE_QUERY · POST_ANSWER · SESSION_START/END · ESCALATION · COMPLIANCE_ALERT — full lifecycle</a:t>
+            </a:r>
+          </a:p>
+        </p:txBody>
+      </p:sp>
+      <p:sp>
+        <p:nvSpPr>
+          <p:cNvPr id="20" name="TextBox 19"/>
+          <p:cNvSpPr txBox="1"/>
+          <p:nvPr/>
+        </p:nvSpPr>
+        <p:spPr>
+          <a:xfrm>
+            <a:off x="365760" y="6080760"/>
+            <a:ext cx="11430000" cy="594360"/>
+          </a:xfrm>
+          <a:prstGeom prst="rect">
+            <a:avLst/>
+          </a:prstGeom>
+          <a:noFill/>
+        </p:spPr>
+        <p:txBody>
+          <a:bodyPr wrap="square">
+            <a:spAutoFit/>
+          </a:bodyPr>
+          <a:lstStyle/>
+          <a:p>
+            <a:pPr algn="l"/>
+            <a:r>
+              <a:rPr sz="1000" b="0" i="1">
+                <a:solidFill>
+                  <a:srgbClr val="323232"/>
+                </a:solidFill>
+              </a:rPr>
+              <a:t>Answer Traceability: Every answer is a verbatim extract from policy text — can be traced back to the exact file and line.  AuditLoggerAgent runs silently after EVERY query type (policy, summary, escalation, fallback).</a:t>
+            </a:r>
+          </a:p>
+        </p:txBody>
+      </p:sp>
+    </p:spTree>
+  </p:cSld>
+  <p:clrMapOvr>
+    <a:masterClrMapping/>
+  </p:clrMapOvr>
+</p:sld>
+</file>
+
+<file path=ppt/slides/slide17.xml><?xml version="1.0" encoding="utf-8"?>
+<p:sld xmlns:a="http://schemas.openxmlformats.org/drawingml/2006/main" xmlns:p="http://schemas.openxmlformats.org/presentationml/2006/main" xmlns:r="http://schemas.openxmlformats.org/officeDocument/2006/relationships">
+  <p:cSld>
+    <p:bg>
+      <p:bgPr>
+        <a:solidFill>
+          <a:srgbClr val="FFFFFF"/>
+        </a:solidFill>
+        <a:effectLst/>
+      </p:bgPr>
+    </p:bg>
+    <p:spTree>
+      <p:nvGrpSpPr>
+        <p:cNvPr id="1" name=""/>
+        <p:cNvGrpSpPr/>
+        <p:nvPr/>
+      </p:nvGrpSpPr>
+      <p:grpSpPr/>
+      <p:sp>
+        <p:nvSpPr>
+          <p:cNvPr id="2" name="Rectangle 1"/>
+          <p:cNvSpPr/>
+          <p:nvPr/>
+        </p:nvSpPr>
+        <p:spPr>
+          <a:xfrm>
+            <a:off x="0" y="0"/>
+            <a:ext cx="12188952" cy="1097280"/>
+          </a:xfrm>
+          <a:prstGeom prst="rect">
+            <a:avLst/>
+          </a:prstGeom>
+          <a:solidFill>
+            <a:srgbClr val="008C40"/>
+          </a:solidFill>
+          <a:ln>
+            <a:noFill/>
+          </a:ln>
+        </p:spPr>
+        <p:style>
+          <a:lnRef idx="1">
+            <a:schemeClr val="accent1"/>
+          </a:lnRef>
+          <a:fillRef idx="3">
+            <a:schemeClr val="accent1"/>
+          </a:fillRef>
+          <a:effectRef idx="2">
+            <a:schemeClr val="accent1"/>
+          </a:effectRef>
+          <a:fontRef idx="minor">
+            <a:schemeClr val="lt1"/>
+          </a:fontRef>
+        </p:style>
+        <p:txBody>
+          <a:bodyPr rtlCol="0" anchor="ctr"/>
+          <a:lstStyle/>
+          <a:p>
+            <a:pPr algn="ctr"/>
+          </a:p>
+        </p:txBody>
+      </p:sp>
+      <p:sp>
+        <p:nvSpPr>
+          <p:cNvPr id="3" name="TextBox 2"/>
+          <p:cNvSpPr txBox="1"/>
+          <p:nvPr/>
+        </p:nvSpPr>
+        <p:spPr>
+          <a:xfrm>
+            <a:off x="365760" y="164592"/>
+            <a:ext cx="11430000" cy="822960"/>
+          </a:xfrm>
+          <a:prstGeom prst="rect">
+            <a:avLst/>
+          </a:prstGeom>
+          <a:noFill/>
+        </p:spPr>
+        <p:txBody>
+          <a:bodyPr wrap="square">
+            <a:spAutoFit/>
+          </a:bodyPr>
+          <a:lstStyle/>
+          <a:p>
+            <a:pPr algn="l"/>
+            <a:r>
+              <a:rPr sz="2600" b="1" i="0">
+                <a:solidFill>
+                  <a:srgbClr val="FFFFFF"/>
+                </a:solidFill>
+              </a:rPr>
+              <a:t>Load Testing Results</a:t>
+            </a:r>
+          </a:p>
+        </p:txBody>
+      </p:sp>
+      <p:sp>
+        <p:nvSpPr>
+          <p:cNvPr id="4" name="TextBox 3"/>
+          <p:cNvSpPr txBox="1"/>
+          <p:nvPr/>
+        </p:nvSpPr>
+        <p:spPr>
+          <a:xfrm>
+            <a:off x="365760" y="1188720"/>
+            <a:ext cx="11430000" cy="457200"/>
+          </a:xfrm>
+          <a:prstGeom prst="rect">
+            <a:avLst/>
+          </a:prstGeom>
+          <a:noFill/>
+        </p:spPr>
+        <p:txBody>
+          <a:bodyPr wrap="square">
+            <a:spAutoFit/>
+          </a:bodyPr>
+          <a:lstStyle/>
+          <a:p>
+            <a:pPr algn="l"/>
+            <a:r>
+              <a:rPr sz="1200" b="0" i="1">
+                <a:solidFill>
+                  <a:srgbClr val="003366"/>
+                </a:solidFill>
+              </a:rPr>
+              <a:t>Real load test: 60 tasks · 10 concurrent workers · 3 iterations of all 20 question types</a:t>
+            </a:r>
+          </a:p>
+        </p:txBody>
+      </p:sp>
+      <p:sp>
+        <p:nvSpPr>
+          <p:cNvPr id="5" name="Rectangle 4"/>
+          <p:cNvSpPr/>
+          <p:nvPr/>
+        </p:nvSpPr>
+        <p:spPr>
+          <a:xfrm>
+            <a:off x="274320" y="1828800"/>
+            <a:ext cx="3749039" cy="1828800"/>
+          </a:xfrm>
+          <a:prstGeom prst="rect">
+            <a:avLst/>
+          </a:prstGeom>
+          <a:solidFill>
+            <a:srgbClr val="003366"/>
+          </a:solidFill>
+          <a:ln>
+            <a:noFill/>
+          </a:ln>
+        </p:spPr>
+        <p:style>
+          <a:lnRef idx="1">
+            <a:schemeClr val="accent1"/>
+          </a:lnRef>
+          <a:fillRef idx="3">
+            <a:schemeClr val="accent1"/>
+          </a:fillRef>
+          <a:effectRef idx="2">
+            <a:schemeClr val="accent1"/>
+          </a:effectRef>
+          <a:fontRef idx="minor">
+            <a:schemeClr val="lt1"/>
+          </a:fontRef>
+        </p:style>
+        <p:txBody>
+          <a:bodyPr rtlCol="0" anchor="ctr"/>
+          <a:lstStyle/>
+          <a:p>
+            <a:pPr algn="ctr"/>
+          </a:p>
+        </p:txBody>
+      </p:sp>
+      <p:sp>
+        <p:nvSpPr>
+          <p:cNvPr id="6" name="TextBox 5"/>
+          <p:cNvSpPr txBox="1"/>
+          <p:nvPr/>
+        </p:nvSpPr>
+        <p:spPr>
+          <a:xfrm>
+            <a:off x="365760" y="1965960"/>
+            <a:ext cx="3566160" cy="914400"/>
+          </a:xfrm>
+          <a:prstGeom prst="rect">
+            <a:avLst/>
+          </a:prstGeom>
+          <a:noFill/>
+        </p:spPr>
+        <p:txBody>
+          <a:bodyPr wrap="square">
+            <a:spAutoFit/>
+          </a:bodyPr>
+          <a:lstStyle/>
+          <a:p>
+            <a:pPr algn="ctr"/>
+            <a:r>
+              <a:rPr sz="3000" b="1" i="0">
+                <a:solidFill>
+                  <a:srgbClr val="FFFFFF"/>
+                </a:solidFill>
+              </a:rPr>
+              <a:t>0</a:t>
+            </a:r>
+          </a:p>
+        </p:txBody>
+      </p:sp>
+      <p:sp>
+        <p:nvSpPr>
+          <p:cNvPr id="7" name="TextBox 6"/>
+          <p:cNvSpPr txBox="1"/>
+          <p:nvPr/>
+        </p:nvSpPr>
+        <p:spPr>
+          <a:xfrm>
+            <a:off x="365760" y="2971800"/>
+            <a:ext cx="3566160" cy="502920"/>
+          </a:xfrm>
+          <a:prstGeom prst="rect">
+            <a:avLst/>
+          </a:prstGeom>
+          <a:noFill/>
+        </p:spPr>
+        <p:txBody>
+          <a:bodyPr wrap="square">
+            <a:spAutoFit/>
+          </a:bodyPr>
+          <a:lstStyle/>
+          <a:p>
+            <a:pPr algn="ctr"/>
+            <a:r>
+              <a:rPr sz="1200" b="0" i="0">
+                <a:solidFill>
+                  <a:srgbClr val="FFFFFF"/>
+                </a:solidFill>
+              </a:rPr>
+              <a:t>Errors</a:t>
+            </a:r>
+          </a:p>
+        </p:txBody>
+      </p:sp>
+      <p:sp>
+        <p:nvSpPr>
+          <p:cNvPr id="8" name="Rectangle 7"/>
+          <p:cNvSpPr/>
+          <p:nvPr/>
+        </p:nvSpPr>
+        <p:spPr>
+          <a:xfrm>
+            <a:off x="4206240" y="1828800"/>
+            <a:ext cx="3749039" cy="1828800"/>
+          </a:xfrm>
+          <a:prstGeom prst="rect">
+            <a:avLst/>
+          </a:prstGeom>
+          <a:solidFill>
+            <a:srgbClr val="008C40"/>
+          </a:solidFill>
+          <a:ln>
+            <a:noFill/>
+          </a:ln>
+        </p:spPr>
+        <p:style>
+          <a:lnRef idx="1">
+            <a:schemeClr val="accent1"/>
+          </a:lnRef>
+          <a:fillRef idx="3">
+            <a:schemeClr val="accent1"/>
+          </a:fillRef>
+          <a:effectRef idx="2">
+            <a:schemeClr val="accent1"/>
+          </a:effectRef>
+          <a:fontRef idx="minor">
+            <a:schemeClr val="lt1"/>
+          </a:fontRef>
+        </p:style>
+        <p:txBody>
+          <a:bodyPr rtlCol="0" anchor="ctr"/>
+          <a:lstStyle/>
+          <a:p>
+            <a:pPr algn="ctr"/>
+          </a:p>
+        </p:txBody>
+      </p:sp>
+      <p:sp>
+        <p:nvSpPr>
+          <p:cNvPr id="9" name="TextBox 8"/>
+          <p:cNvSpPr txBox="1"/>
+          <p:nvPr/>
+        </p:nvSpPr>
+        <p:spPr>
+          <a:xfrm>
+            <a:off x="4297679" y="1965960"/>
+            <a:ext cx="3566160" cy="914400"/>
+          </a:xfrm>
+          <a:prstGeom prst="rect">
+            <a:avLst/>
+          </a:prstGeom>
+          <a:noFill/>
+        </p:spPr>
+        <p:txBody>
+          <a:bodyPr wrap="square">
+            <a:spAutoFit/>
+          </a:bodyPr>
+          <a:lstStyle/>
+          <a:p>
+            <a:pPr algn="ctr"/>
+            <a:r>
+              <a:rPr sz="3000" b="1" i="0">
+                <a:solidFill>
+                  <a:srgbClr val="FFFFFF"/>
+                </a:solidFill>
+              </a:rPr>
+              <a:t>90.0%</a:t>
+            </a:r>
+          </a:p>
+        </p:txBody>
+      </p:sp>
+      <p:sp>
+        <p:nvSpPr>
+          <p:cNvPr id="10" name="TextBox 9"/>
+          <p:cNvSpPr txBox="1"/>
+          <p:nvPr/>
+        </p:nvSpPr>
+        <p:spPr>
+          <a:xfrm>
+            <a:off x="4297679" y="2971800"/>
+            <a:ext cx="3566160" cy="502920"/>
+          </a:xfrm>
+          <a:prstGeom prst="rect">
+            <a:avLst/>
+          </a:prstGeom>
+          <a:noFill/>
+        </p:spPr>
+        <p:txBody>
+          <a:bodyPr wrap="square">
+            <a:spAutoFit/>
+          </a:bodyPr>
+          <a:lstStyle/>
+          <a:p>
+            <a:pPr algn="ctr"/>
+            <a:r>
+              <a:rPr sz="1200" b="0" i="0">
+                <a:solidFill>
+                  <a:srgbClr val="FFFFFF"/>
+                </a:solidFill>
+              </a:rPr>
+              <a:t>Answer Found Rate</a:t>
+            </a:r>
+          </a:p>
+        </p:txBody>
+      </p:sp>
+      <p:sp>
+        <p:nvSpPr>
+          <p:cNvPr id="11" name="Rectangle 10"/>
+          <p:cNvSpPr/>
+          <p:nvPr/>
+        </p:nvSpPr>
+        <p:spPr>
+          <a:xfrm>
+            <a:off x="8138160" y="1828800"/>
+            <a:ext cx="3749039" cy="1828800"/>
+          </a:xfrm>
+          <a:prstGeom prst="rect">
+            <a:avLst/>
+          </a:prstGeom>
+          <a:solidFill>
+            <a:srgbClr val="0066CC"/>
+          </a:solidFill>
+          <a:ln>
+            <a:noFill/>
+          </a:ln>
+        </p:spPr>
+        <p:style>
+          <a:lnRef idx="1">
+            <a:schemeClr val="accent1"/>
+          </a:lnRef>
+          <a:fillRef idx="3">
+            <a:schemeClr val="accent1"/>
+          </a:fillRef>
+          <a:effectRef idx="2">
+            <a:schemeClr val="accent1"/>
+          </a:effectRef>
+          <a:fontRef idx="minor">
+            <a:schemeClr val="lt1"/>
+          </a:fontRef>
+        </p:style>
+        <p:txBody>
+          <a:bodyPr rtlCol="0" anchor="ctr"/>
+          <a:lstStyle/>
+          <a:p>
+            <a:pPr algn="ctr"/>
+          </a:p>
+        </p:txBody>
+      </p:sp>
+      <p:sp>
+        <p:nvSpPr>
+          <p:cNvPr id="12" name="TextBox 11"/>
+          <p:cNvSpPr txBox="1"/>
+          <p:nvPr/>
+        </p:nvSpPr>
+        <p:spPr>
+          <a:xfrm>
+            <a:off x="8229600" y="1965960"/>
+            <a:ext cx="3566160" cy="914400"/>
+          </a:xfrm>
+          <a:prstGeom prst="rect">
+            <a:avLst/>
+          </a:prstGeom>
+          <a:noFill/>
+        </p:spPr>
+        <p:txBody>
+          <a:bodyPr wrap="square">
+            <a:spAutoFit/>
+          </a:bodyPr>
+          <a:lstStyle/>
+          <a:p>
+            <a:pPr algn="ctr"/>
+            <a:r>
+              <a:rPr sz="3000" b="1" i="0">
+                <a:solidFill>
+                  <a:srgbClr val="FFFFFF"/>
+                </a:solidFill>
+              </a:rPr>
+              <a:t>8.78 ms</a:t>
+            </a:r>
+          </a:p>
+        </p:txBody>
+      </p:sp>
+      <p:sp>
+        <p:nvSpPr>
+          <p:cNvPr id="13" name="TextBox 12"/>
+          <p:cNvSpPr txBox="1"/>
+          <p:nvPr/>
+        </p:nvSpPr>
+        <p:spPr>
+          <a:xfrm>
+            <a:off x="8229600" y="2971800"/>
+            <a:ext cx="3566160" cy="502920"/>
+          </a:xfrm>
+          <a:prstGeom prst="rect">
+            <a:avLst/>
+          </a:prstGeom>
+          <a:noFill/>
+        </p:spPr>
+        <p:txBody>
+          <a:bodyPr wrap="square">
+            <a:spAutoFit/>
+          </a:bodyPr>
+          <a:lstStyle/>
+          <a:p>
+            <a:pPr algn="ctr"/>
+            <a:r>
+              <a:rPr sz="1200" b="0" i="0">
+                <a:solidFill>
+                  <a:srgbClr val="FFFFFF"/>
+                </a:solidFill>
+              </a:rPr>
+              <a:t>Median Latency</a:t>
+            </a:r>
+          </a:p>
+        </p:txBody>
+      </p:sp>
+      <p:sp>
+        <p:nvSpPr>
+          <p:cNvPr id="14" name="Rectangle 13"/>
+          <p:cNvSpPr/>
+          <p:nvPr/>
+        </p:nvSpPr>
+        <p:spPr>
+          <a:xfrm>
+            <a:off x="274320" y="3931920"/>
+            <a:ext cx="3749039" cy="1828800"/>
+          </a:xfrm>
+          <a:prstGeom prst="rect">
+            <a:avLst/>
+          </a:prstGeom>
+          <a:solidFill>
+            <a:srgbClr val="007878"/>
+          </a:solidFill>
+          <a:ln>
+            <a:noFill/>
+          </a:ln>
+        </p:spPr>
+        <p:style>
+          <a:lnRef idx="1">
+            <a:schemeClr val="accent1"/>
+          </a:lnRef>
+          <a:fillRef idx="3">
+            <a:schemeClr val="accent1"/>
+          </a:fillRef>
+          <a:effectRef idx="2">
+            <a:schemeClr val="accent1"/>
+          </a:effectRef>
+          <a:fontRef idx="minor">
+            <a:schemeClr val="lt1"/>
+          </a:fontRef>
+        </p:style>
+        <p:txBody>
+          <a:bodyPr rtlCol="0" anchor="ctr"/>
+          <a:lstStyle/>
+          <a:p>
+            <a:pPr algn="ctr"/>
+          </a:p>
+        </p:txBody>
+      </p:sp>
+      <p:sp>
+        <p:nvSpPr>
+          <p:cNvPr id="15" name="TextBox 14"/>
+          <p:cNvSpPr txBox="1"/>
+          <p:nvPr/>
+        </p:nvSpPr>
+        <p:spPr>
+          <a:xfrm>
+            <a:off x="365760" y="4069080"/>
+            <a:ext cx="3566160" cy="914400"/>
+          </a:xfrm>
+          <a:prstGeom prst="rect">
+            <a:avLst/>
+          </a:prstGeom>
+          <a:noFill/>
+        </p:spPr>
+        <p:txBody>
+          <a:bodyPr wrap="square">
+            <a:spAutoFit/>
+          </a:bodyPr>
+          <a:lstStyle/>
+          <a:p>
+            <a:pPr algn="ctr"/>
+            <a:r>
+              <a:rPr sz="3000" b="1" i="0">
+                <a:solidFill>
+                  <a:srgbClr val="FFFFFF"/>
+                </a:solidFill>
+              </a:rPr>
+              <a:t>30.33 ms</a:t>
+            </a:r>
+          </a:p>
+        </p:txBody>
+      </p:sp>
+      <p:sp>
+        <p:nvSpPr>
+          <p:cNvPr id="16" name="TextBox 15"/>
+          <p:cNvSpPr txBox="1"/>
+          <p:nvPr/>
+        </p:nvSpPr>
+        <p:spPr>
+          <a:xfrm>
+            <a:off x="365760" y="5074920"/>
+            <a:ext cx="3566160" cy="502920"/>
+          </a:xfrm>
+          <a:prstGeom prst="rect">
+            <a:avLst/>
+          </a:prstGeom>
+          <a:noFill/>
+        </p:spPr>
+        <p:txBody>
+          <a:bodyPr wrap="square">
+            <a:spAutoFit/>
+          </a:bodyPr>
+          <a:lstStyle/>
+          <a:p>
+            <a:pPr algn="ctr"/>
+            <a:r>
+              <a:rPr sz="1200" b="0" i="0">
+                <a:solidFill>
+                  <a:srgbClr val="FFFFFF"/>
+                </a:solidFill>
+              </a:rPr>
+              <a:t>p99 Latency</a:t>
+            </a:r>
+          </a:p>
+        </p:txBody>
+      </p:sp>
+      <p:sp>
+        <p:nvSpPr>
+          <p:cNvPr id="17" name="Rectangle 16"/>
+          <p:cNvSpPr/>
+          <p:nvPr/>
+        </p:nvSpPr>
+        <p:spPr>
+          <a:xfrm>
+            <a:off x="4206240" y="3931920"/>
+            <a:ext cx="3749039" cy="1828800"/>
+          </a:xfrm>
+          <a:prstGeom prst="rect">
+            <a:avLst/>
+          </a:prstGeom>
+          <a:solidFill>
+            <a:srgbClr val="6400A0"/>
+          </a:solidFill>
+          <a:ln>
+            <a:noFill/>
+          </a:ln>
+        </p:spPr>
+        <p:style>
+          <a:lnRef idx="1">
+            <a:schemeClr val="accent1"/>
+          </a:lnRef>
+          <a:fillRef idx="3">
+            <a:schemeClr val="accent1"/>
+          </a:fillRef>
+          <a:effectRef idx="2">
+            <a:schemeClr val="accent1"/>
+          </a:effectRef>
+          <a:fontRef idx="minor">
+            <a:schemeClr val="lt1"/>
+          </a:fontRef>
+        </p:style>
+        <p:txBody>
+          <a:bodyPr rtlCol="0" anchor="ctr"/>
+          <a:lstStyle/>
+          <a:p>
+            <a:pPr algn="ctr"/>
+          </a:p>
+        </p:txBody>
+      </p:sp>
+      <p:sp>
+        <p:nvSpPr>
+          <p:cNvPr id="18" name="TextBox 17"/>
+          <p:cNvSpPr txBox="1"/>
+          <p:nvPr/>
+        </p:nvSpPr>
+        <p:spPr>
+          <a:xfrm>
+            <a:off x="4297679" y="4069080"/>
+            <a:ext cx="3566160" cy="914400"/>
+          </a:xfrm>
+          <a:prstGeom prst="rect">
+            <a:avLst/>
+          </a:prstGeom>
+          <a:noFill/>
+        </p:spPr>
+        <p:txBody>
+          <a:bodyPr wrap="square">
+            <a:spAutoFit/>
+          </a:bodyPr>
+          <a:lstStyle/>
+          <a:p>
+            <a:pPr algn="ctr"/>
+            <a:r>
+              <a:rPr sz="3000" b="1" i="0">
+                <a:solidFill>
+                  <a:srgbClr val="FFFFFF"/>
+                </a:solidFill>
+              </a:rPr>
+              <a:t>693.0</a:t>
+            </a:r>
+          </a:p>
+        </p:txBody>
+      </p:sp>
+      <p:sp>
+        <p:nvSpPr>
+          <p:cNvPr id="19" name="TextBox 18"/>
+          <p:cNvSpPr txBox="1"/>
+          <p:nvPr/>
+        </p:nvSpPr>
+        <p:spPr>
+          <a:xfrm>
+            <a:off x="4297679" y="5074920"/>
+            <a:ext cx="3566160" cy="502920"/>
+          </a:xfrm>
+          <a:prstGeom prst="rect">
+            <a:avLst/>
+          </a:prstGeom>
+          <a:noFill/>
+        </p:spPr>
+        <p:txBody>
+          <a:bodyPr wrap="square">
+            <a:spAutoFit/>
+          </a:bodyPr>
+          <a:lstStyle/>
+          <a:p>
+            <a:pPr algn="ctr"/>
+            <a:r>
+              <a:rPr sz="1200" b="0" i="0">
+                <a:solidFill>
+                  <a:srgbClr val="FFFFFF"/>
+                </a:solidFill>
+              </a:rPr>
+              <a:t>Requests / sec</a:t>
+            </a:r>
+          </a:p>
+        </p:txBody>
+      </p:sp>
+      <p:sp>
+        <p:nvSpPr>
+          <p:cNvPr id="20" name="Rectangle 19"/>
+          <p:cNvSpPr/>
+          <p:nvPr/>
+        </p:nvSpPr>
+        <p:spPr>
+          <a:xfrm>
+            <a:off x="8138160" y="3931920"/>
+            <a:ext cx="3749039" cy="1828800"/>
+          </a:xfrm>
+          <a:prstGeom prst="rect">
+            <a:avLst/>
+          </a:prstGeom>
+          <a:solidFill>
+            <a:srgbClr val="C85A00"/>
+          </a:solidFill>
+          <a:ln>
+            <a:noFill/>
+          </a:ln>
+        </p:spPr>
+        <p:style>
+          <a:lnRef idx="1">
+            <a:schemeClr val="accent1"/>
+          </a:lnRef>
+          <a:fillRef idx="3">
+            <a:schemeClr val="accent1"/>
+          </a:fillRef>
+          <a:effectRef idx="2">
+            <a:schemeClr val="accent1"/>
+          </a:effectRef>
+          <a:fontRef idx="minor">
+            <a:schemeClr val="lt1"/>
+          </a:fontRef>
+        </p:style>
+        <p:txBody>
+          <a:bodyPr rtlCol="0" anchor="ctr"/>
+          <a:lstStyle/>
+          <a:p>
+            <a:pPr algn="ctr"/>
+          </a:p>
+        </p:txBody>
+      </p:sp>
+      <p:sp>
+        <p:nvSpPr>
+          <p:cNvPr id="21" name="TextBox 20"/>
+          <p:cNvSpPr txBox="1"/>
+          <p:nvPr/>
+        </p:nvSpPr>
+        <p:spPr>
+          <a:xfrm>
+            <a:off x="8229600" y="4069080"/>
+            <a:ext cx="3566160" cy="914400"/>
+          </a:xfrm>
+          <a:prstGeom prst="rect">
+            <a:avLst/>
+          </a:prstGeom>
+          <a:noFill/>
+        </p:spPr>
+        <p:txBody>
+          <a:bodyPr wrap="square">
+            <a:spAutoFit/>
+          </a:bodyPr>
+          <a:lstStyle/>
+          <a:p>
+            <a:pPr algn="ctr"/>
+            <a:r>
+              <a:rPr sz="3000" b="1" i="0">
+                <a:solidFill>
+                  <a:srgbClr val="FFFFFF"/>
+                </a:solidFill>
+              </a:rPr>
+              <a:t>60/60</a:t>
+            </a:r>
+          </a:p>
+        </p:txBody>
+      </p:sp>
+      <p:sp>
+        <p:nvSpPr>
+          <p:cNvPr id="22" name="TextBox 21"/>
+          <p:cNvSpPr txBox="1"/>
+          <p:nvPr/>
+        </p:nvSpPr>
+        <p:spPr>
+          <a:xfrm>
+            <a:off x="8229600" y="5074920"/>
+            <a:ext cx="3566160" cy="502920"/>
+          </a:xfrm>
+          <a:prstGeom prst="rect">
+            <a:avLst/>
+          </a:prstGeom>
+          <a:noFill/>
+        </p:spPr>
+        <p:txBody>
+          <a:bodyPr wrap="square">
+            <a:spAutoFit/>
+          </a:bodyPr>
+          <a:lstStyle/>
+          <a:p>
+            <a:pPr algn="ctr"/>
+            <a:r>
+              <a:rPr sz="1200" b="0" i="0">
+                <a:solidFill>
+                  <a:srgbClr val="FFFFFF"/>
+                </a:solidFill>
+              </a:rPr>
+              <a:t>Tasks Completed</a:t>
+            </a:r>
+          </a:p>
+        </p:txBody>
+      </p:sp>
+      <p:sp>
+        <p:nvSpPr>
+          <p:cNvPr id="23" name="TextBox 22"/>
+          <p:cNvSpPr txBox="1"/>
+          <p:nvPr/>
+        </p:nvSpPr>
+        <p:spPr>
+          <a:xfrm>
+            <a:off x="365760" y="6217920"/>
+            <a:ext cx="11430000" cy="457200"/>
+          </a:xfrm>
+          <a:prstGeom prst="rect">
+            <a:avLst/>
+          </a:prstGeom>
+          <a:noFill/>
+        </p:spPr>
+        <p:txBody>
+          <a:bodyPr wrap="square">
+            <a:spAutoFit/>
+          </a:bodyPr>
+          <a:lstStyle/>
+          <a:p>
+            <a:pPr algn="l"/>
+            <a:r>
+              <a:rPr sz="1000" b="0" i="1">
+                <a:solidFill>
+                  <a:srgbClr val="323232"/>
+                </a:solidFill>
+              </a:rPr>
+              <a:t>Min: 4.29 ms  ·  Mean: 9.85 ms  ·  p95: 16.5 ms  ·  Max: 30.33 ms  ·  Wall clock: 0.087 s</a:t>
+            </a:r>
+          </a:p>
+        </p:txBody>
+      </p:sp>
+    </p:spTree>
+  </p:cSld>
+  <p:clrMapOvr>
+    <a:masterClrMapping/>
+  </p:clrMapOvr>
+</p:sld>
+</file>
+
+<file path=ppt/slides/slide18.xml><?xml version="1.0" encoding="utf-8"?>
+<p:sld xmlns:a="http://schemas.openxmlformats.org/drawingml/2006/main" xmlns:p="http://schemas.openxmlformats.org/presentationml/2006/main" xmlns:r="http://schemas.openxmlformats.org/officeDocument/2006/relationships">
+  <p:cSld>
+    <p:bg>
+      <p:bgPr>
+        <a:solidFill>
+          <a:srgbClr val="FFFFFF"/>
+        </a:solidFill>
+        <a:effectLst/>
+      </p:bgPr>
+    </p:bg>
+    <p:spTree>
+      <p:nvGrpSpPr>
+        <p:cNvPr id="1" name=""/>
+        <p:cNvGrpSpPr/>
+        <p:nvPr/>
+      </p:nvGrpSpPr>
+      <p:grpSpPr/>
+      <p:sp>
+        <p:nvSpPr>
+          <p:cNvPr id="2" name="Rectangle 1"/>
+          <p:cNvSpPr/>
+          <p:nvPr/>
+        </p:nvSpPr>
+        <p:spPr>
+          <a:xfrm>
+            <a:off x="0" y="0"/>
+            <a:ext cx="12188952" cy="1097280"/>
+          </a:xfrm>
+          <a:prstGeom prst="rect">
+            <a:avLst/>
+          </a:prstGeom>
+          <a:solidFill>
+            <a:srgbClr val="C85A00"/>
+          </a:solidFill>
+          <a:ln>
+            <a:noFill/>
+          </a:ln>
+        </p:spPr>
+        <p:style>
+          <a:lnRef idx="1">
+            <a:schemeClr val="accent1"/>
+          </a:lnRef>
+          <a:fillRef idx="3">
+            <a:schemeClr val="accent1"/>
+          </a:fillRef>
+          <a:effectRef idx="2">
+            <a:schemeClr val="accent1"/>
+          </a:effectRef>
+          <a:fontRef idx="minor">
+            <a:schemeClr val="lt1"/>
+          </a:fontRef>
+        </p:style>
+        <p:txBody>
+          <a:bodyPr rtlCol="0" anchor="ctr"/>
+          <a:lstStyle/>
+          <a:p>
+            <a:pPr algn="ctr"/>
+          </a:p>
+        </p:txBody>
+      </p:sp>
+      <p:sp>
+        <p:nvSpPr>
+          <p:cNvPr id="3" name="TextBox 2"/>
+          <p:cNvSpPr txBox="1"/>
+          <p:nvPr/>
+        </p:nvSpPr>
+        <p:spPr>
+          <a:xfrm>
+            <a:off x="365760" y="164592"/>
+            <a:ext cx="11430000" cy="822960"/>
+          </a:xfrm>
+          <a:prstGeom prst="rect">
+            <a:avLst/>
+          </a:prstGeom>
+          <a:noFill/>
+        </p:spPr>
+        <p:txBody>
+          <a:bodyPr wrap="square">
+            <a:spAutoFit/>
+          </a:bodyPr>
+          <a:lstStyle/>
+          <a:p>
+            <a:pPr algn="l"/>
+            <a:r>
+              <a:rPr sz="2600" b="1" i="0">
+                <a:solidFill>
+                  <a:srgbClr val="FFFFFF"/>
+                </a:solidFill>
+              </a:rPr>
+              <a:t>Deployment Architecture</a:t>
+            </a:r>
+          </a:p>
+        </p:txBody>
+      </p:sp>
+      <p:sp>
+        <p:nvSpPr>
+          <p:cNvPr id="4" name="TextBox 3"/>
+          <p:cNvSpPr txBox="1"/>
+          <p:nvPr/>
+        </p:nvSpPr>
+        <p:spPr>
+          <a:xfrm>
+            <a:off x="365760" y="1188720"/>
+            <a:ext cx="11430000" cy="457200"/>
+          </a:xfrm>
+          <a:prstGeom prst="rect">
+            <a:avLst/>
+          </a:prstGeom>
+          <a:noFill/>
+        </p:spPr>
+        <p:txBody>
+          <a:bodyPr wrap="square">
+            <a:spAutoFit/>
+          </a:bodyPr>
+          <a:lstStyle/>
+          <a:p>
+            <a:pPr algn="l"/>
+            <a:r>
+              <a:rPr sz="1200" b="0" i="1">
+                <a:solidFill>
+                  <a:srgbClr val="003366"/>
+                </a:solidFill>
+              </a:rPr>
+              <a:t>Three deployment modes — all sharing the same offline knowledge base. No cloud dependency. No external APIs. Runs on any internal server.</a:t>
+            </a:r>
+          </a:p>
+        </p:txBody>
+      </p:sp>
+      <p:sp>
+        <p:nvSpPr>
+          <p:cNvPr id="5" name="Rectangle 4"/>
+          <p:cNvSpPr/>
+          <p:nvPr/>
+        </p:nvSpPr>
+        <p:spPr>
+          <a:xfrm>
+            <a:off x="182880" y="1920240"/>
+            <a:ext cx="2834640" cy="914400"/>
+          </a:xfrm>
+          <a:prstGeom prst="rect">
+            <a:avLst/>
+          </a:prstGeom>
+          <a:solidFill>
+            <a:srgbClr val="0066CC"/>
+          </a:solidFill>
+          <a:ln>
+            <a:noFill/>
+          </a:ln>
+        </p:spPr>
+        <p:style>
+          <a:lnRef idx="1">
+            <a:schemeClr val="accent1"/>
+          </a:lnRef>
+          <a:fillRef idx="3">
+            <a:schemeClr val="accent1"/>
+          </a:fillRef>
+          <a:effectRef idx="2">
+            <a:schemeClr val="accent1"/>
+          </a:effectRef>
+          <a:fontRef idx="minor">
+            <a:schemeClr val="lt1"/>
+          </a:fontRef>
+        </p:style>
+        <p:txBody>
+          <a:bodyPr rtlCol="0" anchor="ctr"/>
+          <a:lstStyle/>
+          <a:p>
+            <a:pPr algn="ctr"/>
+          </a:p>
+        </p:txBody>
+      </p:sp>
+      <p:sp>
+        <p:nvSpPr>
+          <p:cNvPr id="6" name="TextBox 5"/>
+          <p:cNvSpPr txBox="1"/>
+          <p:nvPr/>
+        </p:nvSpPr>
+        <p:spPr>
+          <a:xfrm>
+            <a:off x="274320" y="1965960"/>
+            <a:ext cx="2651760" cy="777240"/>
+          </a:xfrm>
+          <a:prstGeom prst="rect">
+            <a:avLst/>
+          </a:prstGeom>
+          <a:noFill/>
+        </p:spPr>
+        <p:txBody>
+          <a:bodyPr wrap="square">
+            <a:spAutoFit/>
+          </a:bodyPr>
+          <a:lstStyle/>
+          <a:p>
+            <a:pPr algn="l"/>
+            <a:r>
+              <a:rPr sz="1200" b="1" i="0">
+                <a:solidFill>
+                  <a:srgbClr val="FFFFFF"/>
+                </a:solidFill>
+              </a:rPr>
+              <a:t>Option A
+Local Deploy</a:t>
+            </a:r>
+          </a:p>
+        </p:txBody>
+      </p:sp>
+      <p:sp>
+        <p:nvSpPr>
+          <p:cNvPr id="7" name="Rectangle 6"/>
+          <p:cNvSpPr/>
+          <p:nvPr/>
+        </p:nvSpPr>
+        <p:spPr>
+          <a:xfrm>
+            <a:off x="182880" y="3017520"/>
+            <a:ext cx="2834640" cy="1005840"/>
+          </a:xfrm>
+          <a:prstGeom prst="rect">
+            <a:avLst/>
+          </a:prstGeom>
+          <a:solidFill>
+            <a:srgbClr val="CCE5FF"/>
+          </a:solidFill>
+          <a:ln>
+            <a:noFill/>
+          </a:ln>
+        </p:spPr>
+        <p:style>
+          <a:lnRef idx="1">
+            <a:schemeClr val="accent1"/>
+          </a:lnRef>
+          <a:fillRef idx="3">
+            <a:schemeClr val="accent1"/>
+          </a:fillRef>
+          <a:effectRef idx="2">
+            <a:schemeClr val="accent1"/>
+          </a:effectRef>
+          <a:fontRef idx="minor">
+            <a:schemeClr val="lt1"/>
+          </a:fontRef>
+        </p:style>
+        <p:txBody>
+          <a:bodyPr rtlCol="0" anchor="ctr"/>
+          <a:lstStyle/>
+          <a:p>
+            <a:pPr algn="ctr"/>
+          </a:p>
+        </p:txBody>
+      </p:sp>
+      <p:sp>
+        <p:nvSpPr>
+          <p:cNvPr id="8" name="TextBox 7"/>
+          <p:cNvSpPr txBox="1"/>
+          <p:nvPr/>
+        </p:nvSpPr>
+        <p:spPr>
+          <a:xfrm>
+            <a:off x="274320" y="3063240"/>
+            <a:ext cx="2651760" cy="731520"/>
+          </a:xfrm>
+          <a:prstGeom prst="rect">
+            <a:avLst/>
+          </a:prstGeom>
+          <a:noFill/>
+        </p:spPr>
+        <p:txBody>
+          <a:bodyPr wrap="square">
+            <a:spAutoFit/>
+          </a:bodyPr>
+          <a:lstStyle/>
+          <a:p>
+            <a:pPr algn="l"/>
+            <a:r>
+              <a:rPr sz="900" b="0" i="0">
+                <a:solidFill>
+                  <a:srgbClr val="003366"/>
+                </a:solidFill>
+              </a:rPr>
+              <a:t>streamlit run app.py</a:t>
+            </a:r>
+          </a:p>
+        </p:txBody>
+      </p:sp>
+      <p:sp>
+        <p:nvSpPr>
+          <p:cNvPr id="9" name="Rectangle 8"/>
+          <p:cNvSpPr/>
+          <p:nvPr/>
+        </p:nvSpPr>
+        <p:spPr>
+          <a:xfrm>
+            <a:off x="182880" y="4160520"/>
+            <a:ext cx="2834640" cy="1097280"/>
+          </a:xfrm>
+          <a:prstGeom prst="rect">
+            <a:avLst/>
+          </a:prstGeom>
+          <a:solidFill>
+            <a:srgbClr val="F0F5FF"/>
+          </a:solidFill>
+          <a:ln>
+            <a:noFill/>
+          </a:ln>
+        </p:spPr>
+        <p:style>
+          <a:lnRef idx="1">
+            <a:schemeClr val="accent1"/>
+          </a:lnRef>
+          <a:fillRef idx="3">
+            <a:schemeClr val="accent1"/>
+          </a:fillRef>
+          <a:effectRef idx="2">
+            <a:schemeClr val="accent1"/>
+          </a:effectRef>
+          <a:fontRef idx="minor">
+            <a:schemeClr val="lt1"/>
+          </a:fontRef>
+        </p:style>
+        <p:txBody>
+          <a:bodyPr rtlCol="0" anchor="ctr"/>
+          <a:lstStyle/>
+          <a:p>
+            <a:pPr algn="ctr"/>
+          </a:p>
+        </p:txBody>
+      </p:sp>
+      <p:sp>
+        <p:nvSpPr>
+          <p:cNvPr id="10" name="TextBox 9"/>
+          <p:cNvSpPr txBox="1"/>
+          <p:nvPr/>
+        </p:nvSpPr>
+        <p:spPr>
+          <a:xfrm>
+            <a:off x="274320" y="4206240"/>
+            <a:ext cx="2651760" cy="914400"/>
+          </a:xfrm>
+          <a:prstGeom prst="rect">
+            <a:avLst/>
+          </a:prstGeom>
+          <a:noFill/>
+        </p:spPr>
+        <p:txBody>
+          <a:bodyPr wrap="square">
+            <a:spAutoFit/>
+          </a:bodyPr>
+          <a:lstStyle/>
+          <a:p>
+            <a:pPr algn="l"/>
+            <a:r>
+              <a:rPr sz="900" b="0" i="0">
+                <a:solidFill>
+                  <a:srgbClr val="323232"/>
+                </a:solidFill>
+              </a:rPr>
+              <a:t>Single user  ·  http://localhost:8501
+Py 3.10+  ·  streamlit&gt;=1.32</a:t>
+            </a:r>
+          </a:p>
+        </p:txBody>
+      </p:sp>
+      <p:sp>
+        <p:nvSpPr>
+          <p:cNvPr id="11" name="Rectangle 10"/>
+          <p:cNvSpPr/>
+          <p:nvPr/>
+        </p:nvSpPr>
+        <p:spPr>
+          <a:xfrm>
+            <a:off x="3182112" y="1920240"/>
+            <a:ext cx="2834640" cy="914400"/>
+          </a:xfrm>
+          <a:prstGeom prst="rect">
+            <a:avLst/>
+          </a:prstGeom>
+          <a:solidFill>
+            <a:srgbClr val="007878"/>
+          </a:solidFill>
+          <a:ln>
+            <a:noFill/>
+          </a:ln>
+        </p:spPr>
+        <p:style>
+          <a:lnRef idx="1">
+            <a:schemeClr val="accent1"/>
+          </a:lnRef>
+          <a:fillRef idx="3">
+            <a:schemeClr val="accent1"/>
+          </a:fillRef>
+          <a:effectRef idx="2">
+            <a:schemeClr val="accent1"/>
+          </a:effectRef>
+          <a:fontRef idx="minor">
+            <a:schemeClr val="lt1"/>
+          </a:fontRef>
+        </p:style>
+        <p:txBody>
+          <a:bodyPr rtlCol="0" anchor="ctr"/>
+          <a:lstStyle/>
+          <a:p>
+            <a:pPr algn="ctr"/>
+          </a:p>
+        </p:txBody>
+      </p:sp>
+      <p:sp>
+        <p:nvSpPr>
+          <p:cNvPr id="12" name="TextBox 11"/>
+          <p:cNvSpPr txBox="1"/>
+          <p:nvPr/>
+        </p:nvSpPr>
+        <p:spPr>
+          <a:xfrm>
+            <a:off x="3273552" y="1965960"/>
+            <a:ext cx="2651760" cy="777240"/>
+          </a:xfrm>
+          <a:prstGeom prst="rect">
+            <a:avLst/>
+          </a:prstGeom>
+          <a:noFill/>
+        </p:spPr>
+        <p:txBody>
+          <a:bodyPr wrap="square">
+            <a:spAutoFit/>
+          </a:bodyPr>
+          <a:lstStyle/>
+          <a:p>
+            <a:pPr algn="l"/>
+            <a:r>
+              <a:rPr sz="1200" b="1" i="0">
+                <a:solidFill>
+                  <a:srgbClr val="FFFFFF"/>
+                </a:solidFill>
+              </a:rPr>
+              <a:t>Option B
+Docker</a:t>
+            </a:r>
+          </a:p>
+        </p:txBody>
+      </p:sp>
+      <p:sp>
+        <p:nvSpPr>
+          <p:cNvPr id="13" name="Rectangle 12"/>
+          <p:cNvSpPr/>
+          <p:nvPr/>
+        </p:nvSpPr>
+        <p:spPr>
+          <a:xfrm>
+            <a:off x="3182112" y="3017520"/>
+            <a:ext cx="2834640" cy="1005840"/>
+          </a:xfrm>
+          <a:prstGeom prst="rect">
+            <a:avLst/>
+          </a:prstGeom>
+          <a:solidFill>
+            <a:srgbClr val="CCE5FF"/>
+          </a:solidFill>
+          <a:ln>
+            <a:noFill/>
+          </a:ln>
+        </p:spPr>
+        <p:style>
+          <a:lnRef idx="1">
+            <a:schemeClr val="accent1"/>
+          </a:lnRef>
+          <a:fillRef idx="3">
+            <a:schemeClr val="accent1"/>
+          </a:fillRef>
+          <a:effectRef idx="2">
+            <a:schemeClr val="accent1"/>
+          </a:effectRef>
+          <a:fontRef idx="minor">
+            <a:schemeClr val="lt1"/>
+          </a:fontRef>
+        </p:style>
+        <p:txBody>
+          <a:bodyPr rtlCol="0" anchor="ctr"/>
+          <a:lstStyle/>
+          <a:p>
+            <a:pPr algn="ctr"/>
+          </a:p>
+        </p:txBody>
+      </p:sp>
+      <p:sp>
+        <p:nvSpPr>
+          <p:cNvPr id="14" name="TextBox 13"/>
+          <p:cNvSpPr txBox="1"/>
+          <p:nvPr/>
+        </p:nvSpPr>
+        <p:spPr>
+          <a:xfrm>
+            <a:off x="3273552" y="3063240"/>
+            <a:ext cx="2651760" cy="731520"/>
+          </a:xfrm>
+          <a:prstGeom prst="rect">
+            <a:avLst/>
+          </a:prstGeom>
+          <a:noFill/>
+        </p:spPr>
+        <p:txBody>
+          <a:bodyPr wrap="square">
+            <a:spAutoFit/>
+          </a:bodyPr>
+          <a:lstStyle/>
+          <a:p>
+            <a:pPr algn="l"/>
+            <a:r>
+              <a:rPr sz="900" b="0" i="0">
+                <a:solidFill>
+                  <a:srgbClr val="003366"/>
+                </a:solidFill>
+              </a:rPr>
+              <a:t>docker build -t bank-assistant .
+docker run -p 8501:8501 ...</a:t>
+            </a:r>
+          </a:p>
+        </p:txBody>
+      </p:sp>
+      <p:sp>
+        <p:nvSpPr>
+          <p:cNvPr id="15" name="Rectangle 14"/>
+          <p:cNvSpPr/>
+          <p:nvPr/>
+        </p:nvSpPr>
+        <p:spPr>
+          <a:xfrm>
+            <a:off x="3182112" y="4160520"/>
+            <a:ext cx="2834640" cy="1097280"/>
+          </a:xfrm>
+          <a:prstGeom prst="rect">
+            <a:avLst/>
+          </a:prstGeom>
+          <a:solidFill>
+            <a:srgbClr val="F0F5FF"/>
+          </a:solidFill>
+          <a:ln>
+            <a:noFill/>
+          </a:ln>
+        </p:spPr>
+        <p:style>
+          <a:lnRef idx="1">
+            <a:schemeClr val="accent1"/>
+          </a:lnRef>
+          <a:fillRef idx="3">
+            <a:schemeClr val="accent1"/>
+          </a:fillRef>
+          <a:effectRef idx="2">
+            <a:schemeClr val="accent1"/>
+          </a:effectRef>
+          <a:fontRef idx="minor">
+            <a:schemeClr val="lt1"/>
+          </a:fontRef>
+        </p:style>
+        <p:txBody>
+          <a:bodyPr rtlCol="0" anchor="ctr"/>
+          <a:lstStyle/>
+          <a:p>
+            <a:pPr algn="ctr"/>
+          </a:p>
+        </p:txBody>
+      </p:sp>
+      <p:sp>
+        <p:nvSpPr>
+          <p:cNvPr id="16" name="TextBox 15"/>
+          <p:cNvSpPr txBox="1"/>
+          <p:nvPr/>
+        </p:nvSpPr>
+        <p:spPr>
+          <a:xfrm>
+            <a:off x="3273552" y="4206240"/>
+            <a:ext cx="2651760" cy="914400"/>
+          </a:xfrm>
+          <a:prstGeom prst="rect">
+            <a:avLst/>
+          </a:prstGeom>
+          <a:noFill/>
+        </p:spPr>
+        <p:txBody>
+          <a:bodyPr wrap="square">
+            <a:spAutoFit/>
+          </a:bodyPr>
+          <a:lstStyle/>
+          <a:p>
+            <a:pPr algn="l"/>
+            <a:r>
+              <a:rPr sz="900" b="0" i="0">
+                <a:solidFill>
+                  <a:srgbClr val="323232"/>
+                </a:solidFill>
+              </a:rPr>
+              <a:t>Isolated container  ·  Any OS
+FROM python:3.11-slim</a:t>
+            </a:r>
+          </a:p>
+        </p:txBody>
+      </p:sp>
+      <p:sp>
+        <p:nvSpPr>
+          <p:cNvPr id="17" name="Rectangle 16"/>
+          <p:cNvSpPr/>
+          <p:nvPr/>
+        </p:nvSpPr>
+        <p:spPr>
+          <a:xfrm>
+            <a:off x="6181344" y="1920240"/>
+            <a:ext cx="2834640" cy="914400"/>
+          </a:xfrm>
+          <a:prstGeom prst="rect">
+            <a:avLst/>
+          </a:prstGeom>
+          <a:solidFill>
+            <a:srgbClr val="003366"/>
+          </a:solidFill>
+          <a:ln>
+            <a:noFill/>
+          </a:ln>
+        </p:spPr>
+        <p:style>
+          <a:lnRef idx="1">
+            <a:schemeClr val="accent1"/>
+          </a:lnRef>
+          <a:fillRef idx="3">
+            <a:schemeClr val="accent1"/>
+          </a:fillRef>
+          <a:effectRef idx="2">
+            <a:schemeClr val="accent1"/>
+          </a:effectRef>
+          <a:fontRef idx="minor">
+            <a:schemeClr val="lt1"/>
+          </a:fontRef>
+        </p:style>
+        <p:txBody>
+          <a:bodyPr rtlCol="0" anchor="ctr"/>
+          <a:lstStyle/>
+          <a:p>
+            <a:pPr algn="ctr"/>
+          </a:p>
+        </p:txBody>
+      </p:sp>
+      <p:sp>
+        <p:nvSpPr>
+          <p:cNvPr id="18" name="TextBox 17"/>
+          <p:cNvSpPr txBox="1"/>
+          <p:nvPr/>
+        </p:nvSpPr>
+        <p:spPr>
+          <a:xfrm>
+            <a:off x="6272783" y="1965960"/>
+            <a:ext cx="2651760" cy="777240"/>
+          </a:xfrm>
+          <a:prstGeom prst="rect">
+            <a:avLst/>
+          </a:prstGeom>
+          <a:noFill/>
+        </p:spPr>
+        <p:txBody>
+          <a:bodyPr wrap="square">
+            <a:spAutoFit/>
+          </a:bodyPr>
+          <a:lstStyle/>
+          <a:p>
+            <a:pPr algn="l"/>
+            <a:r>
+              <a:rPr sz="1200" b="1" i="0">
+                <a:solidFill>
+                  <a:srgbClr val="FFFFFF"/>
+                </a:solidFill>
+              </a:rPr>
+              <a:t>Option C
+Network / Team</a:t>
+            </a:r>
+          </a:p>
+        </p:txBody>
+      </p:sp>
+      <p:sp>
+        <p:nvSpPr>
+          <p:cNvPr id="19" name="Rectangle 18"/>
+          <p:cNvSpPr/>
+          <p:nvPr/>
+        </p:nvSpPr>
+        <p:spPr>
+          <a:xfrm>
+            <a:off x="6181344" y="3017520"/>
+            <a:ext cx="2834640" cy="1005840"/>
+          </a:xfrm>
+          <a:prstGeom prst="rect">
+            <a:avLst/>
+          </a:prstGeom>
+          <a:solidFill>
+            <a:srgbClr val="CCE5FF"/>
+          </a:solidFill>
+          <a:ln>
+            <a:noFill/>
+          </a:ln>
+        </p:spPr>
+        <p:style>
+          <a:lnRef idx="1">
+            <a:schemeClr val="accent1"/>
+          </a:lnRef>
+          <a:fillRef idx="3">
+            <a:schemeClr val="accent1"/>
+          </a:fillRef>
+          <a:effectRef idx="2">
+            <a:schemeClr val="accent1"/>
+          </a:effectRef>
+          <a:fontRef idx="minor">
+            <a:schemeClr val="lt1"/>
+          </a:fontRef>
+        </p:style>
+        <p:txBody>
+          <a:bodyPr rtlCol="0" anchor="ctr"/>
+          <a:lstStyle/>
+          <a:p>
+            <a:pPr algn="ctr"/>
+          </a:p>
+        </p:txBody>
+      </p:sp>
+      <p:sp>
+        <p:nvSpPr>
+          <p:cNvPr id="20" name="TextBox 19"/>
+          <p:cNvSpPr txBox="1"/>
+          <p:nvPr/>
+        </p:nvSpPr>
+        <p:spPr>
+          <a:xfrm>
+            <a:off x="6272783" y="3063240"/>
+            <a:ext cx="2651760" cy="731520"/>
+          </a:xfrm>
+          <a:prstGeom prst="rect">
+            <a:avLst/>
+          </a:prstGeom>
+          <a:noFill/>
+        </p:spPr>
+        <p:txBody>
+          <a:bodyPr wrap="square">
+            <a:spAutoFit/>
+          </a:bodyPr>
+          <a:lstStyle/>
+          <a:p>
+            <a:pPr algn="l"/>
+            <a:r>
+              <a:rPr sz="900" b="0" i="0">
+                <a:solidFill>
+                  <a:srgbClr val="003366"/>
+                </a:solidFill>
+              </a:rPr>
+              <a:t>streamlit run app.py
+--server.address=0.0.0.0</a:t>
+            </a:r>
+          </a:p>
+        </p:txBody>
+      </p:sp>
+      <p:sp>
+        <p:nvSpPr>
+          <p:cNvPr id="21" name="Rectangle 20"/>
+          <p:cNvSpPr/>
+          <p:nvPr/>
+        </p:nvSpPr>
+        <p:spPr>
+          <a:xfrm>
+            <a:off x="6181344" y="4160520"/>
+            <a:ext cx="2834640" cy="1097280"/>
+          </a:xfrm>
+          <a:prstGeom prst="rect">
+            <a:avLst/>
+          </a:prstGeom>
+          <a:solidFill>
+            <a:srgbClr val="F0F5FF"/>
+          </a:solidFill>
+          <a:ln>
+            <a:noFill/>
+          </a:ln>
+        </p:spPr>
+        <p:style>
+          <a:lnRef idx="1">
+            <a:schemeClr val="accent1"/>
+          </a:lnRef>
+          <a:fillRef idx="3">
+            <a:schemeClr val="accent1"/>
+          </a:fillRef>
+          <a:effectRef idx="2">
+            <a:schemeClr val="accent1"/>
+          </a:effectRef>
+          <a:fontRef idx="minor">
+            <a:schemeClr val="lt1"/>
+          </a:fontRef>
+        </p:style>
+        <p:txBody>
+          <a:bodyPr rtlCol="0" anchor="ctr"/>
+          <a:lstStyle/>
+          <a:p>
+            <a:pPr algn="ctr"/>
+          </a:p>
+        </p:txBody>
+      </p:sp>
+      <p:sp>
+        <p:nvSpPr>
+          <p:cNvPr id="22" name="TextBox 21"/>
+          <p:cNvSpPr txBox="1"/>
+          <p:nvPr/>
+        </p:nvSpPr>
+        <p:spPr>
+          <a:xfrm>
+            <a:off x="6272783" y="4206240"/>
+            <a:ext cx="2651760" cy="914400"/>
+          </a:xfrm>
+          <a:prstGeom prst="rect">
+            <a:avLst/>
+          </a:prstGeom>
+          <a:noFill/>
+        </p:spPr>
+        <p:txBody>
+          <a:bodyPr wrap="square">
+            <a:spAutoFit/>
+          </a:bodyPr>
+          <a:lstStyle/>
+          <a:p>
+            <a:pPr algn="l"/>
+            <a:r>
+              <a:rPr sz="900" b="0" i="0">
+                <a:solidFill>
+                  <a:srgbClr val="323232"/>
+                </a:solidFill>
+              </a:rPr>
+              <a:t>Team access  ·  http://&lt;ip&gt;:8501
+Intranet firewall required</a:t>
+            </a:r>
+          </a:p>
+        </p:txBody>
+      </p:sp>
+      <p:sp>
+        <p:nvSpPr>
+          <p:cNvPr id="23" name="Rectangle 22"/>
+          <p:cNvSpPr/>
+          <p:nvPr/>
+        </p:nvSpPr>
+        <p:spPr>
+          <a:xfrm>
+            <a:off x="9180576" y="1920240"/>
+            <a:ext cx="2834640" cy="914400"/>
+          </a:xfrm>
+          <a:prstGeom prst="rect">
+            <a:avLst/>
+          </a:prstGeom>
+          <a:solidFill>
+            <a:srgbClr val="6400A0"/>
+          </a:solidFill>
+          <a:ln>
+            <a:noFill/>
+          </a:ln>
+        </p:spPr>
+        <p:style>
+          <a:lnRef idx="1">
+            <a:schemeClr val="accent1"/>
+          </a:lnRef>
+          <a:fillRef idx="3">
+            <a:schemeClr val="accent1"/>
+          </a:fillRef>
+          <a:effectRef idx="2">
+            <a:schemeClr val="accent1"/>
+          </a:effectRef>
+          <a:fontRef idx="minor">
+            <a:schemeClr val="lt1"/>
+          </a:fontRef>
+        </p:style>
+        <p:txBody>
+          <a:bodyPr rtlCol="0" anchor="ctr"/>
+          <a:lstStyle/>
+          <a:p>
+            <a:pPr algn="ctr"/>
+          </a:p>
+        </p:txBody>
+      </p:sp>
+      <p:sp>
+        <p:nvSpPr>
+          <p:cNvPr id="24" name="TextBox 23"/>
+          <p:cNvSpPr txBox="1"/>
+          <p:nvPr/>
+        </p:nvSpPr>
+        <p:spPr>
+          <a:xfrm>
+            <a:off x="9272015" y="1965960"/>
+            <a:ext cx="2651760" cy="777240"/>
+          </a:xfrm>
+          <a:prstGeom prst="rect">
+            <a:avLst/>
+          </a:prstGeom>
+          <a:noFill/>
+        </p:spPr>
+        <p:txBody>
+          <a:bodyPr wrap="square">
+            <a:spAutoFit/>
+          </a:bodyPr>
+          <a:lstStyle/>
+          <a:p>
+            <a:pPr algn="l"/>
+            <a:r>
+              <a:rPr sz="1200" b="1" i="0">
+                <a:solidFill>
+                  <a:srgbClr val="FFFFFF"/>
+                </a:solidFill>
+              </a:rPr>
+              <a:t>Option D
+MCP Server</a:t>
+            </a:r>
+          </a:p>
+        </p:txBody>
+      </p:sp>
+      <p:sp>
+        <p:nvSpPr>
+          <p:cNvPr id="25" name="Rectangle 24"/>
+          <p:cNvSpPr/>
+          <p:nvPr/>
+        </p:nvSpPr>
+        <p:spPr>
+          <a:xfrm>
+            <a:off x="9180576" y="3017520"/>
+            <a:ext cx="2834640" cy="1005840"/>
+          </a:xfrm>
+          <a:prstGeom prst="rect">
+            <a:avLst/>
+          </a:prstGeom>
+          <a:solidFill>
+            <a:srgbClr val="CCE5FF"/>
+          </a:solidFill>
+          <a:ln>
+            <a:noFill/>
+          </a:ln>
+        </p:spPr>
+        <p:style>
+          <a:lnRef idx="1">
+            <a:schemeClr val="accent1"/>
+          </a:lnRef>
+          <a:fillRef idx="3">
+            <a:schemeClr val="accent1"/>
+          </a:fillRef>
+          <a:effectRef idx="2">
+            <a:schemeClr val="accent1"/>
+          </a:effectRef>
+          <a:fontRef idx="minor">
+            <a:schemeClr val="lt1"/>
+          </a:fontRef>
+        </p:style>
+        <p:txBody>
+          <a:bodyPr rtlCol="0" anchor="ctr"/>
+          <a:lstStyle/>
+          <a:p>
+            <a:pPr algn="ctr"/>
+          </a:p>
+        </p:txBody>
+      </p:sp>
+      <p:sp>
+        <p:nvSpPr>
+          <p:cNvPr id="26" name="TextBox 25"/>
+          <p:cNvSpPr txBox="1"/>
+          <p:nvPr/>
+        </p:nvSpPr>
+        <p:spPr>
+          <a:xfrm>
+            <a:off x="9272015" y="3063240"/>
+            <a:ext cx="2651760" cy="731520"/>
+          </a:xfrm>
+          <a:prstGeom prst="rect">
+            <a:avLst/>
+          </a:prstGeom>
+          <a:noFill/>
+        </p:spPr>
+        <p:txBody>
+          <a:bodyPr wrap="square">
+            <a:spAutoFit/>
+          </a:bodyPr>
+          <a:lstStyle/>
+          <a:p>
+            <a:pPr algn="l"/>
+            <a:r>
+              <a:rPr sz="900" b="0" i="0">
+                <a:solidFill>
+                  <a:srgbClr val="003366"/>
+                </a:solidFill>
+              </a:rPr>
+              <a:t>python mcp_server.py</a:t>
+            </a:r>
+          </a:p>
+        </p:txBody>
+      </p:sp>
+      <p:sp>
+        <p:nvSpPr>
+          <p:cNvPr id="27" name="Rectangle 26"/>
+          <p:cNvSpPr/>
+          <p:nvPr/>
+        </p:nvSpPr>
+        <p:spPr>
+          <a:xfrm>
+            <a:off x="9180576" y="4160520"/>
+            <a:ext cx="2834640" cy="1097280"/>
+          </a:xfrm>
+          <a:prstGeom prst="rect">
+            <a:avLst/>
+          </a:prstGeom>
+          <a:solidFill>
+            <a:srgbClr val="F0F5FF"/>
+          </a:solidFill>
+          <a:ln>
+            <a:noFill/>
+          </a:ln>
+        </p:spPr>
+        <p:style>
+          <a:lnRef idx="1">
+            <a:schemeClr val="accent1"/>
+          </a:lnRef>
+          <a:fillRef idx="3">
+            <a:schemeClr val="accent1"/>
+          </a:fillRef>
+          <a:effectRef idx="2">
+            <a:schemeClr val="accent1"/>
+          </a:effectRef>
+          <a:fontRef idx="minor">
+            <a:schemeClr val="lt1"/>
+          </a:fontRef>
+        </p:style>
+        <p:txBody>
+          <a:bodyPr rtlCol="0" anchor="ctr"/>
+          <a:lstStyle/>
+          <a:p>
+            <a:pPr algn="ctr"/>
+          </a:p>
+        </p:txBody>
+      </p:sp>
+      <p:sp>
+        <p:nvSpPr>
+          <p:cNvPr id="28" name="TextBox 27"/>
+          <p:cNvSpPr txBox="1"/>
+          <p:nvPr/>
+        </p:nvSpPr>
+        <p:spPr>
+          <a:xfrm>
+            <a:off x="9272015" y="4206240"/>
+            <a:ext cx="2651760" cy="914400"/>
+          </a:xfrm>
+          <a:prstGeom prst="rect">
+            <a:avLst/>
+          </a:prstGeom>
+          <a:noFill/>
+        </p:spPr>
+        <p:txBody>
+          <a:bodyPr wrap="square">
+            <a:spAutoFit/>
+          </a:bodyPr>
+          <a:lstStyle/>
+          <a:p>
+            <a:pPr algn="l"/>
+            <a:r>
+              <a:rPr sz="900" b="0" i="0">
+                <a:solidFill>
+                  <a:srgbClr val="323232"/>
+                </a:solidFill>
+              </a:rPr>
+              <a:t>AI agent access  ·  stdio transport
+Claude Desktop / Claude Code</a:t>
+            </a:r>
+          </a:p>
+        </p:txBody>
+      </p:sp>
+      <p:sp>
+        <p:nvSpPr>
+          <p:cNvPr id="29" name="TextBox 28"/>
+          <p:cNvSpPr txBox="1"/>
+          <p:nvPr/>
+        </p:nvSpPr>
+        <p:spPr>
+          <a:xfrm>
+            <a:off x="365760" y="5486400"/>
+            <a:ext cx="11430000" cy="502920"/>
+          </a:xfrm>
+          <a:prstGeom prst="rect">
+            <a:avLst/>
+          </a:prstGeom>
+          <a:noFill/>
+        </p:spPr>
+        <p:txBody>
+          <a:bodyPr wrap="square">
+            <a:spAutoFit/>
+          </a:bodyPr>
+          <a:lstStyle/>
+          <a:p>
+            <a:pPr algn="l"/>
+            <a:r>
+              <a:rPr sz="1100" b="0" i="1">
+                <a:solidFill>
+                  <a:srgbClr val="0066CC"/>
+                </a:solidFill>
+              </a:rPr>
+              <a:t>All modes share: policies/*.txt  ·  KEYWORD_MAP  ·  7 Subagents  ·  3 Skills  ·  6 Hooks  ·  3 Log Files</a:t>
+            </a:r>
+          </a:p>
+        </p:txBody>
+      </p:sp>
+      <p:sp>
+        <p:nvSpPr>
+          <p:cNvPr id="30" name="Rectangle 29"/>
+          <p:cNvSpPr/>
+          <p:nvPr/>
+        </p:nvSpPr>
+        <p:spPr>
+          <a:xfrm>
+            <a:off x="274320" y="6126480"/>
+            <a:ext cx="2834640" cy="502920"/>
+          </a:xfrm>
+          <a:prstGeom prst="rect">
+            <a:avLst/>
+          </a:prstGeom>
+          <a:solidFill>
+            <a:srgbClr val="003366"/>
+          </a:solidFill>
+          <a:ln>
+            <a:noFill/>
+          </a:ln>
+        </p:spPr>
+        <p:style>
+          <a:lnRef idx="1">
+            <a:schemeClr val="accent1"/>
+          </a:lnRef>
+          <a:fillRef idx="3">
+            <a:schemeClr val="accent1"/>
+          </a:fillRef>
+          <a:effectRef idx="2">
+            <a:schemeClr val="accent1"/>
+          </a:effectRef>
+          <a:fontRef idx="minor">
+            <a:schemeClr val="lt1"/>
+          </a:fontRef>
+        </p:style>
+        <p:txBody>
+          <a:bodyPr rtlCol="0" anchor="ctr"/>
+          <a:lstStyle/>
+          <a:p>
+            <a:pPr algn="ctr"/>
+          </a:p>
+        </p:txBody>
+      </p:sp>
+      <p:sp>
+        <p:nvSpPr>
+          <p:cNvPr id="31" name="TextBox 30"/>
+          <p:cNvSpPr txBox="1"/>
+          <p:nvPr/>
+        </p:nvSpPr>
+        <p:spPr>
+          <a:xfrm>
+            <a:off x="365760" y="6199632"/>
+            <a:ext cx="2743200" cy="365760"/>
+          </a:xfrm>
+          <a:prstGeom prst="rect">
+            <a:avLst/>
+          </a:prstGeom>
+          <a:noFill/>
+        </p:spPr>
+        <p:txBody>
+          <a:bodyPr wrap="square">
+            <a:spAutoFit/>
+          </a:bodyPr>
+          <a:lstStyle/>
+          <a:p>
+            <a:pPr algn="l"/>
+            <a:r>
+              <a:rPr sz="1000" b="1" i="0">
+                <a:solidFill>
+                  <a:srgbClr val="FFFFFF"/>
+                </a:solidFill>
+              </a:rPr>
+              <a:t>Python  3.10+</a:t>
+            </a:r>
+          </a:p>
+        </p:txBody>
+      </p:sp>
+      <p:sp>
+        <p:nvSpPr>
+          <p:cNvPr id="32" name="Rectangle 31"/>
+          <p:cNvSpPr/>
+          <p:nvPr/>
+        </p:nvSpPr>
+        <p:spPr>
+          <a:xfrm>
+            <a:off x="3273551" y="6126480"/>
+            <a:ext cx="2834640" cy="502920"/>
+          </a:xfrm>
+          <a:prstGeom prst="rect">
+            <a:avLst/>
+          </a:prstGeom>
+          <a:solidFill>
+            <a:srgbClr val="007878"/>
+          </a:solidFill>
+          <a:ln>
+            <a:noFill/>
+          </a:ln>
+        </p:spPr>
+        <p:style>
+          <a:lnRef idx="1">
+            <a:schemeClr val="accent1"/>
+          </a:lnRef>
+          <a:fillRef idx="3">
+            <a:schemeClr val="accent1"/>
+          </a:fillRef>
+          <a:effectRef idx="2">
+            <a:schemeClr val="accent1"/>
+          </a:effectRef>
+          <a:fontRef idx="minor">
+            <a:schemeClr val="lt1"/>
+          </a:fontRef>
+        </p:style>
+        <p:txBody>
+          <a:bodyPr rtlCol="0" anchor="ctr"/>
+          <a:lstStyle/>
+          <a:p>
+            <a:pPr algn="ctr"/>
+          </a:p>
+        </p:txBody>
+      </p:sp>
+      <p:sp>
+        <p:nvSpPr>
+          <p:cNvPr id="33" name="TextBox 32"/>
+          <p:cNvSpPr txBox="1"/>
+          <p:nvPr/>
+        </p:nvSpPr>
+        <p:spPr>
+          <a:xfrm>
+            <a:off x="3364991" y="6199632"/>
+            <a:ext cx="2743200" cy="365760"/>
+          </a:xfrm>
+          <a:prstGeom prst="rect">
+            <a:avLst/>
+          </a:prstGeom>
+          <a:noFill/>
+        </p:spPr>
+        <p:txBody>
+          <a:bodyPr wrap="square">
+            <a:spAutoFit/>
+          </a:bodyPr>
+          <a:lstStyle/>
+          <a:p>
+            <a:pPr algn="l"/>
+            <a:r>
+              <a:rPr sz="1000" b="1" i="0">
+                <a:solidFill>
+                  <a:srgbClr val="FFFFFF"/>
+                </a:solidFill>
+              </a:rPr>
+              <a:t>RAM  512 MB+</a:t>
+            </a:r>
+          </a:p>
+        </p:txBody>
+      </p:sp>
+      <p:sp>
+        <p:nvSpPr>
+          <p:cNvPr id="34" name="Rectangle 33"/>
+          <p:cNvSpPr/>
+          <p:nvPr/>
+        </p:nvSpPr>
+        <p:spPr>
+          <a:xfrm>
+            <a:off x="6272783" y="6126480"/>
+            <a:ext cx="2834640" cy="502920"/>
+          </a:xfrm>
+          <a:prstGeom prst="rect">
+            <a:avLst/>
+          </a:prstGeom>
+          <a:solidFill>
+            <a:srgbClr val="0066CC"/>
+          </a:solidFill>
+          <a:ln>
+            <a:noFill/>
+          </a:ln>
+        </p:spPr>
+        <p:style>
+          <a:lnRef idx="1">
+            <a:schemeClr val="accent1"/>
+          </a:lnRef>
+          <a:fillRef idx="3">
+            <a:schemeClr val="accent1"/>
+          </a:fillRef>
+          <a:effectRef idx="2">
+            <a:schemeClr val="accent1"/>
+          </a:effectRef>
+          <a:fontRef idx="minor">
+            <a:schemeClr val="lt1"/>
+          </a:fontRef>
+        </p:style>
+        <p:txBody>
+          <a:bodyPr rtlCol="0" anchor="ctr"/>
+          <a:lstStyle/>
+          <a:p>
+            <a:pPr algn="ctr"/>
+          </a:p>
+        </p:txBody>
+      </p:sp>
+      <p:sp>
+        <p:nvSpPr>
+          <p:cNvPr id="35" name="TextBox 34"/>
+          <p:cNvSpPr txBox="1"/>
+          <p:nvPr/>
+        </p:nvSpPr>
+        <p:spPr>
+          <a:xfrm>
+            <a:off x="6364224" y="6199632"/>
+            <a:ext cx="2743200" cy="365760"/>
+          </a:xfrm>
+          <a:prstGeom prst="rect">
+            <a:avLst/>
+          </a:prstGeom>
+          <a:noFill/>
+        </p:spPr>
+        <p:txBody>
+          <a:bodyPr wrap="square">
+            <a:spAutoFit/>
+          </a:bodyPr>
+          <a:lstStyle/>
+          <a:p>
+            <a:pPr algn="l"/>
+            <a:r>
+              <a:rPr sz="1000" b="1" i="0">
+                <a:solidFill>
+                  <a:srgbClr val="FFFFFF"/>
+                </a:solidFill>
+              </a:rPr>
+              <a:t>Disk  100 MB</a:t>
+            </a:r>
+          </a:p>
+        </p:txBody>
+      </p:sp>
+      <p:sp>
+        <p:nvSpPr>
+          <p:cNvPr id="36" name="Rectangle 35"/>
+          <p:cNvSpPr/>
+          <p:nvPr/>
+        </p:nvSpPr>
+        <p:spPr>
+          <a:xfrm>
+            <a:off x="9272016" y="6126480"/>
+            <a:ext cx="2834640" cy="502920"/>
+          </a:xfrm>
+          <a:prstGeom prst="rect">
+            <a:avLst/>
+          </a:prstGeom>
+          <a:solidFill>
+            <a:srgbClr val="C85A00"/>
+          </a:solidFill>
+          <a:ln>
+            <a:noFill/>
+          </a:ln>
+        </p:spPr>
+        <p:style>
+          <a:lnRef idx="1">
+            <a:schemeClr val="accent1"/>
+          </a:lnRef>
+          <a:fillRef idx="3">
+            <a:schemeClr val="accent1"/>
+          </a:fillRef>
+          <a:effectRef idx="2">
+            <a:schemeClr val="accent1"/>
+          </a:effectRef>
+          <a:fontRef idx="minor">
+            <a:schemeClr val="lt1"/>
+          </a:fontRef>
+        </p:style>
+        <p:txBody>
+          <a:bodyPr rtlCol="0" anchor="ctr"/>
+          <a:lstStyle/>
+          <a:p>
+            <a:pPr algn="ctr"/>
+          </a:p>
+        </p:txBody>
+      </p:sp>
+      <p:sp>
+        <p:nvSpPr>
+          <p:cNvPr id="37" name="TextBox 36"/>
+          <p:cNvSpPr txBox="1"/>
+          <p:nvPr/>
+        </p:nvSpPr>
+        <p:spPr>
+          <a:xfrm>
+            <a:off x="9363456" y="6199632"/>
+            <a:ext cx="2743200" cy="365760"/>
+          </a:xfrm>
+          <a:prstGeom prst="rect">
+            <a:avLst/>
+          </a:prstGeom>
+          <a:noFill/>
+        </p:spPr>
+        <p:txBody>
+          <a:bodyPr wrap="square">
+            <a:spAutoFit/>
+          </a:bodyPr>
+          <a:lstStyle/>
+          <a:p>
+            <a:pPr algn="l"/>
+            <a:r>
+              <a:rPr sz="1000" b="1" i="0">
+                <a:solidFill>
+                  <a:srgbClr val="FFFFFF"/>
+                </a:solidFill>
+              </a:rPr>
+              <a:t>Network  LAN (optional)</a:t>
+            </a:r>
+          </a:p>
+        </p:txBody>
+      </p:sp>
+    </p:spTree>
+  </p:cSld>
+  <p:clrMapOvr>
+    <a:masterClrMapping/>
+  </p:clrMapOvr>
+</p:sld>
+</file>
+
+<file path=ppt/slides/slide19.xml><?xml version="1.0" encoding="utf-8"?>
+<p:sld xmlns:a="http://schemas.openxmlformats.org/drawingml/2006/main" xmlns:p="http://schemas.openxmlformats.org/presentationml/2006/main" xmlns:r="http://schemas.openxmlformats.org/officeDocument/2006/relationships">
+  <p:cSld>
+    <p:bg>
+      <p:bgPr>
+        <a:solidFill>
+          <a:srgbClr val="FFFFFF"/>
+        </a:solidFill>
+        <a:effectLst/>
+      </p:bgPr>
+    </p:bg>
+    <p:spTree>
+      <p:nvGrpSpPr>
+        <p:cNvPr id="1" name=""/>
+        <p:cNvGrpSpPr/>
+        <p:nvPr/>
+      </p:nvGrpSpPr>
+      <p:grpSpPr/>
+      <p:sp>
+        <p:nvSpPr>
+          <p:cNvPr id="2" name="Rectangle 1"/>
+          <p:cNvSpPr/>
+          <p:nvPr/>
+        </p:nvSpPr>
+        <p:spPr>
+          <a:xfrm>
+            <a:off x="0" y="0"/>
+            <a:ext cx="12188952" cy="1097280"/>
+          </a:xfrm>
+          <a:prstGeom prst="rect">
+            <a:avLst/>
+          </a:prstGeom>
+          <a:solidFill>
+            <a:srgbClr val="003366"/>
+          </a:solidFill>
+          <a:ln>
+            <a:noFill/>
+          </a:ln>
+        </p:spPr>
+        <p:style>
+          <a:lnRef idx="1">
+            <a:schemeClr val="accent1"/>
+          </a:lnRef>
+          <a:fillRef idx="3">
+            <a:schemeClr val="accent1"/>
+          </a:fillRef>
+          <a:effectRef idx="2">
+            <a:schemeClr val="accent1"/>
+          </a:effectRef>
+          <a:fontRef idx="minor">
+            <a:schemeClr val="lt1"/>
+          </a:fontRef>
+        </p:style>
+        <p:txBody>
+          <a:bodyPr rtlCol="0" anchor="ctr"/>
+          <a:lstStyle/>
+          <a:p>
+            <a:pPr algn="ctr"/>
+          </a:p>
+        </p:txBody>
+      </p:sp>
+      <p:sp>
+        <p:nvSpPr>
+          <p:cNvPr id="3" name="TextBox 2"/>
+          <p:cNvSpPr txBox="1"/>
+          <p:nvPr/>
+        </p:nvSpPr>
+        <p:spPr>
+          <a:xfrm>
+            <a:off x="365760" y="164592"/>
+            <a:ext cx="11430000" cy="822960"/>
+          </a:xfrm>
+          <a:prstGeom prst="rect">
+            <a:avLst/>
+          </a:prstGeom>
+          <a:noFill/>
+        </p:spPr>
+        <p:txBody>
+          <a:bodyPr wrap="square">
+            <a:spAutoFit/>
+          </a:bodyPr>
+          <a:lstStyle/>
+          <a:p>
+            <a:pPr algn="l"/>
+            <a:r>
+              <a:rPr sz="2600" b="1" i="0">
+                <a:solidFill>
+                  <a:srgbClr val="FFFFFF"/>
+                </a:solidFill>
+              </a:rPr>
+              <a:t>Screenshots of Results</a:t>
+            </a:r>
+          </a:p>
+        </p:txBody>
+      </p:sp>
+      <p:pic>
+        <p:nvPicPr>
+          <p:cNvPr id="4" name="Picture 3" descr="sc9_app_home.png"/>
+          <p:cNvPicPr>
+            <a:picLocks noChangeAspect="1"/>
+          </p:cNvPicPr>
+          <p:nvPr/>
+        </p:nvPicPr>
+        <p:blipFill>
+          <a:blip r:embed="rId2"/>
+          <a:stretch>
+            <a:fillRect/>
+          </a:stretch>
+        </p:blipFill>
+        <p:spPr>
+          <a:xfrm>
+            <a:off x="228600" y="1234440"/>
+            <a:ext cx="3566160" cy="1508760"/>
+          </a:xfrm>
+          <a:prstGeom prst="rect">
+            <a:avLst/>
+          </a:prstGeom>
+        </p:spPr>
+      </p:pic>
+      <p:sp>
+        <p:nvSpPr>
+          <p:cNvPr id="5" name="TextBox 4"/>
+          <p:cNvSpPr txBox="1"/>
+          <p:nvPr/>
+        </p:nvSpPr>
+        <p:spPr>
+          <a:xfrm>
+            <a:off x="228600" y="2770632"/>
+            <a:ext cx="3566160" cy="228600"/>
+          </a:xfrm>
+          <a:prstGeom prst="rect">
+            <a:avLst/>
+          </a:prstGeom>
+          <a:noFill/>
+        </p:spPr>
+        <p:txBody>
+          <a:bodyPr wrap="square">
+            <a:spAutoFit/>
+          </a:bodyPr>
+          <a:lstStyle/>
+          <a:p>
+            <a:pPr algn="ctr"/>
+            <a:r>
+              <a:rPr sz="900" b="1" i="0">
+                <a:solidFill>
+                  <a:srgbClr val="003366"/>
+                </a:solidFill>
+              </a:rPr>
+              <a:t>App Home</a:t>
+            </a:r>
+          </a:p>
+        </p:txBody>
+      </p:sp>
+      <p:pic>
+        <p:nvPicPr>
+          <p:cNvPr id="6" name="Picture 5" descr="sc1_loan_policy_search.png"/>
+          <p:cNvPicPr>
+            <a:picLocks noChangeAspect="1"/>
+          </p:cNvPicPr>
+          <p:nvPr/>
+        </p:nvPicPr>
+        <p:blipFill>
+          <a:blip r:embed="rId3"/>
+          <a:stretch>
+            <a:fillRect/>
+          </a:stretch>
+        </p:blipFill>
+        <p:spPr>
+          <a:xfrm>
+            <a:off x="4050791" y="1234440"/>
+            <a:ext cx="3566160" cy="1508760"/>
+          </a:xfrm>
+          <a:prstGeom prst="rect">
+            <a:avLst/>
+          </a:prstGeom>
+        </p:spPr>
+      </p:pic>
+      <p:sp>
+        <p:nvSpPr>
+          <p:cNvPr id="7" name="TextBox 6"/>
+          <p:cNvSpPr txBox="1"/>
+          <p:nvPr/>
+        </p:nvSpPr>
+        <p:spPr>
+          <a:xfrm>
+            <a:off x="4050791" y="2770632"/>
+            <a:ext cx="3566160" cy="228600"/>
+          </a:xfrm>
+          <a:prstGeom prst="rect">
+            <a:avLst/>
+          </a:prstGeom>
+          <a:noFill/>
+        </p:spPr>
+        <p:txBody>
+          <a:bodyPr wrap="square">
+            <a:spAutoFit/>
+          </a:bodyPr>
+          <a:lstStyle/>
+          <a:p>
+            <a:pPr algn="ctr"/>
+            <a:r>
+              <a:rPr sz="900" b="1" i="0">
+                <a:solidFill>
+                  <a:srgbClr val="003366"/>
+                </a:solidFill>
+              </a:rPr>
+              <a:t>Loan Policy Search</a:t>
+            </a:r>
+          </a:p>
+        </p:txBody>
+      </p:sp>
+      <p:pic>
+        <p:nvPicPr>
+          <p:cNvPr id="8" name="Picture 7" descr="sc2_kyc_search.png"/>
+          <p:cNvPicPr>
+            <a:picLocks noChangeAspect="1"/>
+          </p:cNvPicPr>
+          <p:nvPr/>
+        </p:nvPicPr>
+        <p:blipFill>
+          <a:blip r:embed="rId4"/>
+          <a:stretch>
+            <a:fillRect/>
+          </a:stretch>
+        </p:blipFill>
+        <p:spPr>
+          <a:xfrm>
+            <a:off x="7872983" y="1234440"/>
+            <a:ext cx="3566160" cy="1508760"/>
+          </a:xfrm>
+          <a:prstGeom prst="rect">
+            <a:avLst/>
+          </a:prstGeom>
+        </p:spPr>
+      </p:pic>
+      <p:sp>
+        <p:nvSpPr>
+          <p:cNvPr id="9" name="TextBox 8"/>
+          <p:cNvSpPr txBox="1"/>
+          <p:nvPr/>
+        </p:nvSpPr>
+        <p:spPr>
+          <a:xfrm>
+            <a:off x="7872983" y="2770632"/>
+            <a:ext cx="3566160" cy="228600"/>
+          </a:xfrm>
+          <a:prstGeom prst="rect">
+            <a:avLst/>
+          </a:prstGeom>
+          <a:noFill/>
+        </p:spPr>
+        <p:txBody>
+          <a:bodyPr wrap="square">
+            <a:spAutoFit/>
+          </a:bodyPr>
+          <a:lstStyle/>
+          <a:p>
+            <a:pPr algn="ctr"/>
+            <a:r>
+              <a:rPr sz="900" b="1" i="0">
+                <a:solidFill>
+                  <a:srgbClr val="003366"/>
+                </a:solidFill>
+              </a:rPr>
+              <a:t>KYC Search</a:t>
+            </a:r>
+          </a:p>
+        </p:txBody>
+      </p:sp>
+      <p:pic>
+        <p:nvPicPr>
+          <p:cNvPr id="10" name="Picture 9" descr="sc3_multi_policy.png"/>
+          <p:cNvPicPr>
+            <a:picLocks noChangeAspect="1"/>
+          </p:cNvPicPr>
+          <p:nvPr/>
+        </p:nvPicPr>
+        <p:blipFill>
+          <a:blip r:embed="rId5"/>
+          <a:stretch>
+            <a:fillRect/>
+          </a:stretch>
+        </p:blipFill>
+        <p:spPr>
+          <a:xfrm>
+            <a:off x="228600" y="3218688"/>
+            <a:ext cx="3566160" cy="1508760"/>
+          </a:xfrm>
+          <a:prstGeom prst="rect">
+            <a:avLst/>
+          </a:prstGeom>
+        </p:spPr>
+      </p:pic>
+      <p:sp>
+        <p:nvSpPr>
+          <p:cNvPr id="11" name="TextBox 10"/>
+          <p:cNvSpPr txBox="1"/>
+          <p:nvPr/>
+        </p:nvSpPr>
+        <p:spPr>
+          <a:xfrm>
+            <a:off x="228600" y="4754880"/>
+            <a:ext cx="3566160" cy="228600"/>
+          </a:xfrm>
+          <a:prstGeom prst="rect">
+            <a:avLst/>
+          </a:prstGeom>
+          <a:noFill/>
+        </p:spPr>
+        <p:txBody>
+          <a:bodyPr wrap="square">
+            <a:spAutoFit/>
+          </a:bodyPr>
+          <a:lstStyle/>
+          <a:p>
+            <a:pPr algn="ctr"/>
+            <a:r>
+              <a:rPr sz="900" b="1" i="0">
+                <a:solidFill>
+                  <a:srgbClr val="003366"/>
+                </a:solidFill>
+              </a:rPr>
+              <a:t>Multi-Policy</a:t>
+            </a:r>
+          </a:p>
+        </p:txBody>
+      </p:sp>
+      <p:pic>
+        <p:nvPicPr>
+          <p:cNvPr id="12" name="Picture 11" descr="sc4_summary.png"/>
+          <p:cNvPicPr>
+            <a:picLocks noChangeAspect="1"/>
+          </p:cNvPicPr>
+          <p:nvPr/>
+        </p:nvPicPr>
+        <p:blipFill>
+          <a:blip r:embed="rId6"/>
+          <a:stretch>
+            <a:fillRect/>
+          </a:stretch>
+        </p:blipFill>
+        <p:spPr>
+          <a:xfrm>
+            <a:off x="4050791" y="3218688"/>
+            <a:ext cx="3566160" cy="1508760"/>
+          </a:xfrm>
+          <a:prstGeom prst="rect">
+            <a:avLst/>
+          </a:prstGeom>
+        </p:spPr>
+      </p:pic>
+      <p:sp>
+        <p:nvSpPr>
+          <p:cNvPr id="13" name="TextBox 12"/>
+          <p:cNvSpPr txBox="1"/>
+          <p:nvPr/>
+        </p:nvSpPr>
+        <p:spPr>
+          <a:xfrm>
+            <a:off x="4050791" y="4754880"/>
+            <a:ext cx="3566160" cy="228600"/>
+          </a:xfrm>
+          <a:prstGeom prst="rect">
+            <a:avLst/>
+          </a:prstGeom>
+          <a:noFill/>
+        </p:spPr>
+        <p:txBody>
+          <a:bodyPr wrap="square">
+            <a:spAutoFit/>
+          </a:bodyPr>
+          <a:lstStyle/>
+          <a:p>
+            <a:pPr algn="ctr"/>
+            <a:r>
+              <a:rPr sz="900" b="1" i="0">
+                <a:solidFill>
+                  <a:srgbClr val="003366"/>
+                </a:solidFill>
+              </a:rPr>
+              <a:t>Policy Summary</a:t>
+            </a:r>
+          </a:p>
+        </p:txBody>
+      </p:sp>
+      <p:pic>
+        <p:nvPicPr>
+          <p:cNvPr id="14" name="Picture 13" descr="sc5_escalation.png"/>
+          <p:cNvPicPr>
+            <a:picLocks noChangeAspect="1"/>
+          </p:cNvPicPr>
+          <p:nvPr/>
+        </p:nvPicPr>
+        <p:blipFill>
+          <a:blip r:embed="rId7"/>
+          <a:stretch>
+            <a:fillRect/>
+          </a:stretch>
+        </p:blipFill>
+        <p:spPr>
+          <a:xfrm>
+            <a:off x="7872983" y="3218688"/>
+            <a:ext cx="3566160" cy="1508760"/>
+          </a:xfrm>
+          <a:prstGeom prst="rect">
+            <a:avLst/>
+          </a:prstGeom>
+        </p:spPr>
+      </p:pic>
+      <p:sp>
+        <p:nvSpPr>
+          <p:cNvPr id="15" name="TextBox 14"/>
+          <p:cNvSpPr txBox="1"/>
+          <p:nvPr/>
+        </p:nvSpPr>
+        <p:spPr>
+          <a:xfrm>
+            <a:off x="7872983" y="4754880"/>
+            <a:ext cx="3566160" cy="228600"/>
+          </a:xfrm>
+          <a:prstGeom prst="rect">
+            <a:avLst/>
+          </a:prstGeom>
+          <a:noFill/>
+        </p:spPr>
+        <p:txBody>
+          <a:bodyPr wrap="square">
+            <a:spAutoFit/>
+          </a:bodyPr>
+          <a:lstStyle/>
+          <a:p>
+            <a:pPr algn="ctr"/>
+            <a:r>
+              <a:rPr sz="900" b="1" i="0">
+                <a:solidFill>
+                  <a:srgbClr val="003366"/>
+                </a:solidFill>
+              </a:rPr>
+              <a:t>Escalation</a:t>
+            </a:r>
+          </a:p>
+        </p:txBody>
+      </p:sp>
+      <p:pic>
+        <p:nvPicPr>
+          <p:cNvPr id="16" name="Picture 15" descr="sc6_compliance_alert.png"/>
+          <p:cNvPicPr>
+            <a:picLocks noChangeAspect="1"/>
+          </p:cNvPicPr>
+          <p:nvPr/>
+        </p:nvPicPr>
+        <p:blipFill>
+          <a:blip r:embed="rId8"/>
+          <a:stretch>
+            <a:fillRect/>
+          </a:stretch>
+        </p:blipFill>
+        <p:spPr>
+          <a:xfrm>
+            <a:off x="228600" y="5202936"/>
+            <a:ext cx="3566160" cy="1508760"/>
+          </a:xfrm>
+          <a:prstGeom prst="rect">
+            <a:avLst/>
+          </a:prstGeom>
+        </p:spPr>
+      </p:pic>
+      <p:sp>
+        <p:nvSpPr>
+          <p:cNvPr id="17" name="TextBox 16"/>
+          <p:cNvSpPr txBox="1"/>
+          <p:nvPr/>
+        </p:nvSpPr>
+        <p:spPr>
+          <a:xfrm>
+            <a:off x="228600" y="6739128"/>
+            <a:ext cx="3566160" cy="228600"/>
+          </a:xfrm>
+          <a:prstGeom prst="rect">
+            <a:avLst/>
+          </a:prstGeom>
+          <a:noFill/>
+        </p:spPr>
+        <p:txBody>
+          <a:bodyPr wrap="square">
+            <a:spAutoFit/>
+          </a:bodyPr>
+          <a:lstStyle/>
+          <a:p>
+            <a:pPr algn="ctr"/>
+            <a:r>
+              <a:rPr sz="900" b="1" i="0">
+                <a:solidFill>
+                  <a:srgbClr val="003366"/>
+                </a:solidFill>
+              </a:rPr>
+              <a:t>Compliance Alert</a:t>
+            </a:r>
+          </a:p>
+        </p:txBody>
+      </p:sp>
+      <p:pic>
+        <p:nvPicPr>
+          <p:cNvPr id="18" name="Picture 17" descr="sc7_fallback_selfheal.png"/>
+          <p:cNvPicPr>
+            <a:picLocks noChangeAspect="1"/>
+          </p:cNvPicPr>
+          <p:nvPr/>
+        </p:nvPicPr>
+        <p:blipFill>
+          <a:blip r:embed="rId9"/>
+          <a:stretch>
+            <a:fillRect/>
+          </a:stretch>
+        </p:blipFill>
+        <p:spPr>
+          <a:xfrm>
+            <a:off x="4050791" y="5202936"/>
+            <a:ext cx="3566160" cy="1508760"/>
+          </a:xfrm>
+          <a:prstGeom prst="rect">
+            <a:avLst/>
+          </a:prstGeom>
+        </p:spPr>
+      </p:pic>
+      <p:sp>
+        <p:nvSpPr>
+          <p:cNvPr id="19" name="TextBox 18"/>
+          <p:cNvSpPr txBox="1"/>
+          <p:nvPr/>
+        </p:nvSpPr>
+        <p:spPr>
+          <a:xfrm>
+            <a:off x="4050791" y="6739128"/>
+            <a:ext cx="3566160" cy="228600"/>
+          </a:xfrm>
+          <a:prstGeom prst="rect">
+            <a:avLst/>
+          </a:prstGeom>
+          <a:noFill/>
+        </p:spPr>
+        <p:txBody>
+          <a:bodyPr wrap="square">
+            <a:spAutoFit/>
+          </a:bodyPr>
+          <a:lstStyle/>
+          <a:p>
+            <a:pPr algn="ctr"/>
+            <a:r>
+              <a:rPr sz="900" b="1" i="0">
+                <a:solidFill>
+                  <a:srgbClr val="003366"/>
+                </a:solidFill>
+              </a:rPr>
+              <a:t>Self-Healing Fallback</a:t>
+            </a:r>
+          </a:p>
+        </p:txBody>
+      </p:sp>
+      <p:pic>
+        <p:nvPicPr>
+          <p:cNvPr id="20" name="Picture 19" descr="sc8_account_opening.png"/>
+          <p:cNvPicPr>
+            <a:picLocks noChangeAspect="1"/>
+          </p:cNvPicPr>
+          <p:nvPr/>
+        </p:nvPicPr>
+        <p:blipFill>
+          <a:blip r:embed="rId10"/>
+          <a:stretch>
+            <a:fillRect/>
+          </a:stretch>
+        </p:blipFill>
+        <p:spPr>
+          <a:xfrm>
+            <a:off x="7872983" y="5202936"/>
+            <a:ext cx="3566160" cy="1508760"/>
+          </a:xfrm>
+          <a:prstGeom prst="rect">
+            <a:avLst/>
+          </a:prstGeom>
+        </p:spPr>
+      </p:pic>
+      <p:sp>
+        <p:nvSpPr>
+          <p:cNvPr id="21" name="TextBox 20"/>
+          <p:cNvSpPr txBox="1"/>
+          <p:nvPr/>
+        </p:nvSpPr>
+        <p:spPr>
+          <a:xfrm>
+            <a:off x="7872983" y="6739128"/>
+            <a:ext cx="3566160" cy="228600"/>
+          </a:xfrm>
+          <a:prstGeom prst="rect">
+            <a:avLst/>
+          </a:prstGeom>
+          <a:noFill/>
+        </p:spPr>
+        <p:txBody>
+          <a:bodyPr wrap="square">
+            <a:spAutoFit/>
+          </a:bodyPr>
+          <a:lstStyle/>
+          <a:p>
+            <a:pPr algn="ctr"/>
+            <a:r>
+              <a:rPr sz="900" b="1" i="0">
+                <a:solidFill>
+                  <a:srgbClr val="003366"/>
+                </a:solidFill>
+              </a:rPr>
+              <a:t>Account Opening</a:t>
             </a:r>
           </a:p>
         </p:txBody>
